--- a/day46/heap and pq notes.pptx
+++ b/day46/heap and pq notes.pptx
@@ -18,6 +18,7 @@
     <p:sldId id="266" r:id="rId12"/>
     <p:sldId id="267" r:id="rId13"/>
     <p:sldId id="268" r:id="rId14"/>
+    <p:sldId id="273" r:id="rId15"/>
   </p:sldIdLst>
   <p:sldSz cx="12192000" cy="6858000"/>
   <p:notesSz cx="6858000" cy="9144000"/>
@@ -952,6 +953,145 @@
   <inkml:trace contextRef="#ctx0" brushRef="#br0" timeOffset="321687">27231 11986 20713,'19'-39'983,"1"-1"0,-1 1 0,8-12 0,3 13-473,20 30-339,-17 19 0,2 7-977,11 11 0,5 8 806,-9-5 0,3 5 0,2 2 0,-3-2-1009,2 1 0,-1-1 0,3 3 491,-3-2 1,5 3-1,2 2 1,-1-1-1,-5-4 396,-6-6 1,-2-2 0,-1-1-1,-1 0 1,9 7 0,-2-2-1,-3-2 1,-3-3 0,1 0-1</inkml:trace>
   <inkml:trace contextRef="#ctx0" brushRef="#br0" timeOffset="322596">23876 13933 16768,'-60'11'1648,"-1"1"1,16-3-1,7-1-1059,7-2-12,55-5-477,0-2-47,9-2 1,6 0-29,-2 0 0,2-1-1221,14-1 1,3 0 1214,4 0 1,1 0-9,-15 2 0,0 1 0,-2-1 36,-1 0 0,-2 1-28,4-1 1,-9 2 14,-21 0-17,-65 0 11,-5 2-177,10 0 0,-2-1 163,3 2 0,2-1 0,8 1 0,-1-1-656,-14 2 0,1 0 676,-11 1-721,24 0 1,5 0 703,15 0 27,-1 3 40,25-2 199,13 1-221,36 1-45,-11-3-6,3-1 0,1-1 2160,-4 0-2165,-3 0 0,-1 0 5,-2-1 2707,-5 1-2673,-32 0-17,-52 0 0,4-1-301,-2 1 1,-2 0 300,12 0 0,0 0 47,-8 2 1,-2-1 167,2 1 1,2 0-37,-8 1-134,16-1 118,45-4 22,19-2-56,28-5-104,-19 2 0,4 0-933,17-2 0,2-1 866,-18 3 0,-1 1-272,18-2 0,-2 0-4630,-24 3 1,-2 0 2639,20-1 1,-17 2 0,-32 2 0</inkml:trace>
   <inkml:trace contextRef="#ctx0" brushRef="#br0" timeOffset="342730">13281 14486 22543,'-32'-45'741,"-1"1"0,4 4 0,5 7-450,10 12-173,8 10-68,6 6 34,10 15 17,6 15-1738,-1 6 0,0 4 1659,5 19 0,-6-6 1,-1 3-155,-5-15 1,-1 0 147,1 7 1,2 0 14,-1-8 0,2-2 126,12 12 173,7-23 17,9-30-117,10-28-531,-17 3 0,1-4 327,-6 6 0,0-3 1,1 0 445,4-4 0,1-2 0,1 0-441,2-2 1,1 0 0,1 0-8,1-1 1,0 1-1,1 0-7,-1 2 0,0 1 0,0 0-10,-2 4 0,1 0 1,-1 1 7,-2 4 0,-1 1 0,-1 1-217,14-8 1,-1 2 128,-5 6 1,-1 3-350,-5 4 1,1 3-812,-5 4 1,-1 3 1232,26-2 0,-27 7 0,-7 4 0</inkml:trace>
+</inkml:ink>
+</file>
+
+<file path=ppt/ink/ink13.xml><?xml version="1.0" encoding="utf-8"?>
+<inkml:ink xmlns:inkml="http://www.w3.org/2003/InkML">
+  <inkml:definitions>
+    <inkml:context xml:id="ctx0">
+      <inkml:inkSource xml:id="inkSrc0">
+        <inkml:traceFormat>
+          <inkml:channel name="X" type="integer" min="-2.14748E9" max="2.14748E9" units="cm"/>
+          <inkml:channel name="Y" type="integer" min="-2.14748E9" max="2.14748E9" units="cm"/>
+          <inkml:channel name="F" type="integer" max="32767" units="dev"/>
+        </inkml:traceFormat>
+        <inkml:channelProperties>
+          <inkml:channelProperty channel="X" name="resolution" value="1000" units="1/cm"/>
+          <inkml:channelProperty channel="Y" name="resolution" value="1000" units="1/cm"/>
+          <inkml:channelProperty channel="F" name="resolution" value="0" units="1/dev"/>
+        </inkml:channelProperties>
+      </inkml:inkSource>
+      <inkml:timestamp xml:id="ts0" timeString="2025-11-14T15:43:57.404"/>
+    </inkml:context>
+    <inkml:brush xml:id="br0">
+      <inkml:brushProperty name="width" value="0.05292" units="cm"/>
+      <inkml:brushProperty name="height" value="0.05292" units="cm"/>
+      <inkml:brushProperty name="color" value="#FF0000"/>
+    </inkml:brush>
+  </inkml:definitions>
+  <inkml:trace contextRef="#ctx0" brushRef="#br0">2887 3154 23842,'-11'-54'965,"0"0"0,2 2 1,1 16-709,4 32-162,3 8 29,0 17 32,1 22-100,1-10 0,-2 5-14,-1 23 0,-2 2-362,1-17 1,1 2 287,-2 0 0,-1 5 0,1-3-1260,-1 6 0,2 1 1292,0-5 0,1 1 0,0-4 0,0-4 0,1-3 0,0-6 0,1 1 0</inkml:trace>
+  <inkml:trace contextRef="#ctx0" brushRef="#br0" timeOffset="625">4640 3795 25769,'30'-54'175,"-1"0"1,-2 1-1,-5 2-128,-11 15 1,-4-1-865,-1-6 1,-2-3 841,-1-4 0,-3-4-22,-4 8 1,-1-2 0,0 3 1,0-3 1,-3 1 7,-2 3 0,-2-1 1,0 7 8,-5-3 292,3 10 1,-2 4-248,2 13 257,-1 2-290,-4 31-6,-1 18-23,-2 13-369,9-10 1,2 4 352,2-1 0,3 3-480,-2 14 0,2 5 394,3-19 0,1 1 0,1 1-219,2 1 1,1 0-1,2 0-310,0-1 1,1 0 0,2-2-776,2-3 1,2-2 0,0-1-2207,7 10 0,1-4 3515,-1-12 0,0-4 0,2 1 0,-7-17 0</inkml:trace>
+  <inkml:trace contextRef="#ctx0" brushRef="#br0" timeOffset="1059">4512 3717 21078,'-21'-45'540,"0"1"0,15-3 0,12 8-173,38 14-347,-8 7 1,7-1 0,-3 2-728,-8 3 1,1-1 715,9-2 1,6-3-1,-2 1-1,2-1 1,-1 0-4,-8 5 1,1-1 0,-1 0-6,15-6 0,-2 2 65,-8 2 1,-2 2 1,-11 3 0,-3 1 409,4-1-285,-21 9 386,-23 14-135,-14 12-100,-14 13-157,-2 10-101,7 6-61,15-1-7,15-2 24,19-5-29,28-5 6,9-15 918,4-6-907,4-14 28,-17-13 34,4-8 97,-24-8 1,-5-2-65,2-9 358,-4-18-212,-16 19-62,-8-1-28,-6-6-22,-15 1-112,0 15-34,-2 7-17,2 13-61,6 11-19,-2 8-2961,5 17 2199,16 3 0,1-6 0,10-9 0</inkml:trace>
+  <inkml:trace contextRef="#ctx0" brushRef="#br0" timeOffset="1676">7562 3255 21783,'3'-47'674,"1"0"1,-1 0 0,3-10 0,-3 5-305,-6 17 0,-3 5 173,-5-1-375,-12-4-20,-4 28-75,-11 25-34,5 3-3,3 12 1,0 6-21,8-7 1,2 1-479,-11 18 1,2 2 466,9-7 1,3 0-3,4-1 0,3-1-6,2-10 0,4-3 94,12 32-91,25-26 61,7-12 23,16-22-17,-8-32-8,-25 5 0,-1-3 25,12-22 50,-11 6 1,-2-1-236,-8 13 1,-1 0 212,5-12 0,-1 1 101,1-11-12,-6 18-128,-6 17 967,-4 12-1040,-6 36 23,-6 9-15,1-2 0,0 4-2,-3 2 0,1 1-278,1-6 1,0 2 97,1 6 1,-1 5-1,3-1-1267,1 7 1,2 1-1837,2-5 0,0 3 0,1-5 1929,4-2 0,1-6 0,5 12 0,-5-41 0</inkml:trace>
+  <inkml:trace contextRef="#ctx0" brushRef="#br0" timeOffset="4442">9706 3267 22772,'-24'-3'56,"31"0"-62,30 1 1,12 1-986,2-1 0,2 0 926,0-2 1,1 1-62,-6 0 0,-2 0 297,-10 0 0,-3 3-255,2 7 439,-40 12-310,-37 17 11,7-11 0,-5 3-611,-9 4 0,-3 1 628,15-8 0,0 0 0,0-1 61,-16 13 1,2-2-37,7-4 0,5-2 396,11-7 0,5-1-293,2 5 107,33-14-78,26-13-174,-7-4 0,4-4-422,9-4 1,2-4 393,5-3 0,-1-2 11,1-3 0,-2-2 3,-4-1 0,-4-2-9,-6-1 1,-4-3 2,-7-1 1,-6-2 512,-5 1 0,-5-1-443,-7 2 1,-5 1 179,-15-23-17,1 30 0,-3 3-73,-7-4 263,-9-2-364,25 22 28,-2-1-134,12 7-17,1 6 39,8 11 882,9 14-904,11 17 2,-9-17 1,0 2-117,2 5 0,-1 2-12,-1 3 0,-2 1-351,-3 3 1,-4 1-1087,-6 1 0,-4 1 1574,-8 2 0,-2-4 0,-3 8 0,-5-11 0</inkml:trace>
+  <inkml:trace contextRef="#ctx0" brushRef="#br0" timeOffset="5100">11350 3645 22447,'8'-59'1226,"0"1"1,-1 6 0,0 3-956,-3 15 1,1 3 25,-1-9-224,-4 21-90,0 22 28,-3 22-22,-3 26 14,1-13 0,-2 3-217,-1 7 1,0 4 104,0-6 1,0 3 0,1-3-531,-1 5 0,0 0 112,2-2 1,-1 2-1,2-3-778,1 0 1,2-2-730,-2 8 1,1-2-995,1-11 1,0-4-1851,-5 7 4211,-1-33 2756,-1-36 729,1-31-1609,4 14 1,2-6-363,0-10 0,1-5-47,0 5 1,1-5 0,0 2-1105,2 4 0,0 1 0,0 0 550,0 1 0,-1 0 1,2 1 197,1 5 0,1 1 1,-1 3-280,2-6 1,1 2 159,1-8 0,1 1-224,0 9 0,2 4-6,-1 8 0,4 4-34,24-12-55,-10 22 429,21 12-435,-10 19-12,15 11 4,-27-3 0,-2 5-29,3 12 1,-4 4 1158,-7-12 1,-4 2-1179,0 16 0,-9 1 22,-25 12 40,2-23 0,-6-2-1,-7-3 1,-6-3 44,-10-4 1,-1-4-35,15-6 1,2-3-6,-9-1 1,4-7 617,9-12-9222,24-30 7874,16 8 0,10-7 0,-6 26 1</inkml:trace>
+  <inkml:trace contextRef="#ctx0" brushRef="#br0" timeOffset="5591">11983 3159 25842,'0'-8'16,"-1"2"-44,32 37 34,-8-2-12,1 12 23,-11 11 17,-16-9-23,-6-5 28,-14-13 90,3-14 157,-4-5-135,9-15-73,7-9-55,18-10-12,3 3-11,24-8-1682,-9 16 0,1 0 1682,21-11-237,-4 8 1,0 2 236,5 0-181,8-2 209,-21 5-28,-21 6 67,-2-6 3038,-9 3-3021,-4-2 690,-2 6-679,0-1 330,0 4-257,0-1-107,0 4-66,0 0-1,0 7 6,0 0 34,-1 20-62,0 1-23,-2 18-178,-2 1-706,-2 6-57,1-10-5135,-1 7 5279,3-20 0,2-6 0,0-10 0</inkml:trace>
+  <inkml:trace contextRef="#ctx0" brushRef="#br0" timeOffset="5758">12492 2971 21948,'10'-44'-1692,"-7"4"1,7 48 0</inkml:trace>
+  <inkml:trace contextRef="#ctx0" brushRef="#br0" timeOffset="6358">12734 3086 26015,'25'7'-11,"-1"16"0,-16 18 33,-2 12-22,-7-3 11,-4-7 51,-4-11 84,-2-15 38,2-11-44,0-15-44,4-10-35,1-13 23,4-9 6,7-5-23,4-1 0,7 4-22,2 9-45,1 9-6,6 11 1,3 7 5,-2 5-17,10 10-22,3 13 28,-1 6-12,3 11 18,-17-3-7,-10 0-27,-10-2 45,-11-7 27,-2-6 23,-3-10 0,2-8-22,3-11 0,2-10-12,3-10 6,7-6-6,6-1-16,6 2-6,2 6 6,0 6-18,-1 8 1,1 7 6,2 3-12,4 8 11,2 5-27,2 8-7,-1 6-10,-3 5-152,-3 2-520,-5 0-1155,-4-1-3130,-4-3 5007,-2-6 0,-4-9 0,-2-6 0</inkml:trace>
+  <inkml:trace contextRef="#ctx0" brushRef="#br0" timeOffset="6451">13615 3199 5739,'0'0'0</inkml:trace>
+  <inkml:trace contextRef="#ctx0" brushRef="#br0" timeOffset="6935">13615 3196 18632,'-24'-31'5490,"6"5"-4673,17 19-497,1 4-197,0 1-95,3 5 28,4 2 6,10 3 16,7-1 34,10-2 12,3-6 21,0-6 1,-5-6-6,-5-9 28,-9-6-6,-6-6 1,-8-1 10,-9 2-5,-6 4-11,-6 8-62,-3 7-22,-1 8-11,-9 15-51,10 2 28,-11 23-17,16 3-33,1 16-28,16 5-381,16-20 0,5-3-1272,17 14 1013,-1-18 1,-1-5 0,-9-11-1,2-1 1</inkml:trace>
+  <inkml:trace contextRef="#ctx0" brushRef="#br0" timeOffset="38975">9140 5730 23046,'-11'-45'499,"-1"-1"1,1 4 0,3 10-424,6 25-69,1 5 24,8 13-16,6 18-5,7 18 0,-8-15 1,-2 3-339,-1 5 1,-1 2 323,-2 3 1,-2 2 2,-1-1 0,-2-1 15,-2-3 0,-2-2 0,1-7 0,-2-2 143,-6 10 235,1-18 1,0-18-152,2-19-57,1-17-60,2-21-82,4 18 0,1-2 101,3-6 0,2 0-140,3-1 0,3 0 11,2 2 0,4 2 16,7 1 1,1 3-20,12-7-8,-12 22 0,2 5-3,8 7-127,12 11 121,0 12-11,-15 4 1,0 2 5,11 12-37,-12-5 0,0 2-428,5 17-213,-14-16 0,-2 2-2299,-1 8 0,-4 0-3504,4 14 6492,-12-22 0,-3-4 0,-3-13 0,-1-2 0</inkml:trace>
+  <inkml:trace contextRef="#ctx0" brushRef="#br0" timeOffset="39368">10683 5585 24811,'-23'37'-17,"0"0"0,-7 7 0,-1-2-395,6-9 1,0-2-2237,-8 9 1,0-1 1779,11-13 0,0-2-1474,-3 3 1,1-3-2521,-7-2 1053,0-8 3809,15-39 2822,11-15 7,6-13-353,1 20 0,0 0 1433,-3-19-2313,-3 19 1,-2-1-438,-4-10-431,-6 9-285,9 20 1364,4 8-1690,8 3-50,23 4-78,-2 3 22,16 4 1,6 3-26,-9 0 0,0 1-520,8 2 1,3 2 110,3 3 0,1 3-4117,3 4 0,-1 1 4540,-5-3 0,-1-1 0,-6-1 0,-6-2 0,-7-4 0</inkml:trace>
+  <inkml:trace contextRef="#ctx0" brushRef="#br0" timeOffset="40525">11593 5744 21752,'-12'-52'1182,"0"-1"0,2 7 0,3 7-1002,5 11-113,6 13-45,1 8 6,20 11-22,2 12-12,19 13 12,-1 13-18,-23-17 1,-2 1-34,-2 4 1,-3 1-169,-4 1 1,-3 1 153,-6 0 0,-4-1 59,-13 22 56,-12-16-11,2-19 40,-3-15 43,10-29-94,4 5 56,15-42-57,20 18-269,6-11 241,-5 29 1,4 2-1,21-13 3,-9 12 1,3 1-6,-6 6 0,1 2-220,5-1 1,-1 2 213,-7 6 0,-2 2 3,27-4 11,-10 4 266,-15 3-226,-15 3-1,-15 0-22,-16 6 254,-12 5-243,-11 10 446,-2 6-468,5 7-12,7 2-5,11 4 45,9 1-22,14-1-29,12-4 12,15-7-1,11-10 23,8-7-17,-11-9 101,14-16 28,-28-6-44,5-15-35,-23-1 1,-16-4-17,-9-1-1,-13-1-27,-2 5 0,1 4 5,5 9-16,8 8 5,8 8-28,9 4-11,10 1 23,13 0-1,14 2 1,11 0-12,11 1 17,-28 0 0,0 0 0,0 0 0,-1 1 11,29 0 0,-13 1-28,-13 1 1,-14 1 16,-11 3 11,-13 7 0,-8 9 6,-10 9-6,-2 9 11,2 3 6,9 0-44,14-5-24,13-5 40,17-6 22,-1-16 1,3-4-17,14 3 13,-10-8 1,1-5 58,4-12 29,6-10 10,-15-11-16,-13-9-22,-12-4-12,-15-4-11,-11 4-6,-15 6 1,-9 9-18,-8 7 1,-1 8-17,8 8-6,14 5-90,9 8-234,13 6-768,9 8-1955,13 10 3036,18 10 0,-15-15 0,3-1 0</inkml:trace>
+  <inkml:trace contextRef="#ctx0" brushRef="#br0" timeOffset="40875">13584 5873 27018,'-5'-55'209,"0"0"0,0 0 0,3 3-176,3 15 1,1 1-1103,1-8 0,-1-1 1088,2-6 1,-1-2-6,-1-1 0,-1-1 3,-2 3 0,-1 2 74,-2 5 0,-1 4-72,-3 8 1,-1 4 497,-10-12-477,0 19-12,4 12-40,2 12 1124,2 14-1107,-1 18-22,0 19 11,7-17 1,1 2-440,0 6 1,2 3 410,0 3 1,2 2-49,3 1 1,2-1-129,2 0 0,4-1-639,3-3 0,4-2-20,1-3 1,3-2-922,1-6 1,1-2 1247,-2-5 1,0-3 0,3 2 0,-8-11 0</inkml:trace>
+  <inkml:trace contextRef="#ctx0" brushRef="#br0" timeOffset="41052">13423 5639 26206,'13'-31'-367,"-1"0"1,7 2 0,5 6-844,17 14 1,7 6 77,7-5 0,-2 0 0,7 0 0,-3-1 0</inkml:trace>
+  <inkml:trace contextRef="#ctx0" brushRef="#br0" timeOffset="41785">14724 5453 26178,'3'-51'89,"5"27"-66,1 61-12,1 2 0,-2 4 6,-5-8-6,1 7 84,-5-5-5,0-16 319,-2-7-325,1-18 16,-2-10-4,2-14-24,1-15-36,6 8 1,1-1-14,4-16-4,3 12 1,3 1 25,13-7-155,-10 19 1,1 2 131,23-11-11,2 15-16,18 19 5,-19 8-3,-8 6 0,-1 5-14,-9 1 1,-2 4-362,13 16 0,-2 5-636,-9-3 0,-2 4-3902,-1 11 1,-5 2 4555,-9-13 0,-4-3 0,-1 14 0,-4-23 0</inkml:trace>
+  <inkml:trace contextRef="#ctx0" brushRef="#br0" timeOffset="43285">16505 4779 9081,'-53'-12'60,"-1"0"1,1 1 0,-1-1 0,0 0 0,-8-2 0,3 1 0,-2 1-373,7 2 1,-3 1 0,1 0 0,1 1 602,5 2 0,1 1 0,0 0 1,2 1-707,-4-1 1,1 0 0,-8 0 701,5 1 1,-8 0-1,-4-1 1,-2 1 0,2-1-1,4 2-459,1-1 0,4 1 1,0 1-1,-2-1 1,-3 0 197,2 1 0,-3-1 1,-2 1-1,-1-1 1,0 1-1,0 0 0,2 0-212,6 1 0,0-1 0,1 1 0,0 0 1,0 1-1,-1-1 0,0 1 197,-2 0 0,0 0 0,-1 0 1,0 1-1,-1-1 0,1 1 1,-1 0-106,-2 0 1,0 1 0,0-1 0,0 1 0,0 0 0,-1 0 0,0 1 117,7-1 1,0 1-1,-1-1 1,1 1-1,-1 0 1,1 0-1,-1 1 1,1-1-30,-2 1 1,1 0 0,0 0 0,-1 0 0,1 1-1,-1-1 1,1 1 0,0 0 24,-1 0 0,1 0 1,-1 0-1,1 0 0,-1 1 1,1-1-1,0 1 1,-1 0-3,2 0 0,-1 0 0,0 1 0,1-1 1,-1 1-1,1 0 0,0 0 0,-1 0 1,2 0 1,-1 1 0,1-1-1,-1 1 1,1-1 0,-1 1-1,1 0 1,0 0 5,1 1 0,-1-1 0,1 1 1,0-1-1,0 1 0,0 0 0,0 0 1,0 0 1,-6 2 0,-1 0 0,0 0 0,0 0 1,1 0-1,0 1 0,-1-1-3,2 1 0,0 0 0,0 1 0,1-1 0,-1 1 0,1 0 0,0 0-2,1 0 0,0 0 1,0 0-1,1 1 1,0 0-1,0 0 1,0 0-11,2 0 1,1 0 0,-1 1 0,1-1 0,0 1-1,1 0 1,0 0-4,-6 2 0,0 1 1,1-1-1,0 1 1,1 0-1,1-1-4,2 1 1,1-1 0,1 1-1,0-1 1,1 1 0,0 0-5,-4 3 0,0-1 0,2 1 0,0 1 1,2-1 66,-7 5 1,2-1-1,2 2 1,2 0-79,7-2 0,2 0 1,2 2-1,2 0 146,-3 7 1,4 0-1,4 3-189,-2 14 0,9 3 465,13-2 1,11 1-399,13 0 0,10-1 11,12 0 0,10-2-5,-5-16 1,5-1 0,4-2-5,-5-6 1,2-2 0,3 0 0,1-1-10,8 1 0,1-1 0,3-1 0,1 0-49,-6-4 1,1-1-1,2 0 1,0 0-1,1-2 78,-4-1 1,2 0-1,0-1 1,0 0-1,0-1 1,-2-1-130,2 1 0,-2 0 0,-1-2 1,3 1-1,5-1 150,-5-1 0,4-1 1,2 1-1,3-1 1,1 1-1,-1-2 1,-2 1-1,-2-2-116,-3 0 0,-2 0 0,-2-1 1,1-1-1,0 0 0,3 1 0,3-1 82,-5 1 0,2-1 0,2 1 0,2-1 0,1 1 0,1-1 0,-1 1 0,0-2 0,-1 1 0,-1-1-2,2 0 1,-1 0 0,0 0 0,-1-1 0,0 0-1,0 0 1,1-1 0,-1 1 0,2-1-1,-5 0 1,1 0 0,0 0 0,0-1 0,0 1 0,0-1 0,1 0-1,-1 0 1,1-1 0,-1 1-13,2-1 0,0 1 0,-1-1 0,1 0 0,0 0 0,0 0 0,1-1 0,0 1 0,1-2 1,2 1 14,-8-1 0,1 0 0,2-1 0,0 1 0,1-1 0,0 0 0,1-1 1,-1 1-1,-1-1 0,-1 1 0,-1 0 0,-1 0 0,-2 0-10,7-1 0,-3 1 1,-1-1-1,-1 1 0,-2 0 1,2-1-1,0 0 1,2 0-1,2-1 15,-4 0 1,2 0 0,2-1 0,1 1 0,1-2 0,0 1 0,0-1 0,0 1 0,-2-1 0,-2 1-1,-1-1 1,-4 1 22,8-2 1,-4 1-1,-2 0 1,-2-1 0,1 1-1,-1-1 1,2-1-1,2 1-3,2-1 0,1 0 0,1-1 1,1 0-1,0 0 0,0-1 0,-1 1 1,1-1-1,-2 0-1,-4 0 1,1 1-1,-1-1 1,0 0-1,0-1 1,-1 1-1,0-1 1,-1-1 0,0 1-2,4-2 1,-1 0-1,0-1 1,-1 0 0,-1 0-1,0-1 1,0 0-1,-1 0-2,3-3 1,-1 1 0,0-1-1,-1 0 1,-1-1 0,-1 0 0,-1-1-1,3-2 1,-1-1 0,-1 0-1,-1-1 1,-2 0 0,-2-1 87,2-3 1,-1 0 0,-2-1 0,-3-1 0,-3-1-71,0-4 0,-2 0 0,-6-2 0,-5-1 121,-3-9 1,-8-2-1,-12 0-322,-13 1 0,-11 1 0,-9 3-344,-2 9 0,-7 2 0,-5 2 1,-3 1 481,-5 3 0,-7 2 0,-3 2 0,2 1 0,6 2 0,-4-4 0,5 4 0,-2 1 0,-6 4 0,0 1 0,-1-1 0</inkml:trace>
+  <inkml:trace contextRef="#ctx0" brushRef="#br0" timeOffset="56675">7323 4281 21170,'-14'-37'-471,"29"3"390,12 23 0,9 4-624,10-4 0,1 1 573,-9 2 1,-1 1-225,11-1 1,-3 2-172,9-1 733,-26 10-212,-38 5 6,-37 11 19,17-8 1,-4 1-292,-4 1 0,-3 2 0,0-1 401,-13 5 0,-1 0-23,13-3 1,-2 0-1,4-2-17,2 1 1,3-1 126,-1 0 1,3 0 630,-1 5 226,10-4 561,30-6-1229,31-12 83,6-4-219,-5-3 0,4-2-19,10-6 0,1-2-673,2 1 0,0-2 186,-13 5 0,0-1 1,-3 2-2486,3-2 1,-4 3 2706,15-6 1,-25 11 0,-18 6-1</inkml:trace>
+  <inkml:trace contextRef="#ctx0" brushRef="#br0" timeOffset="62013">3790 8928 15929,'0'-3'5030,"0"1"-2818,0 2-1814,-2-45-194,-3 32-229,-2-32 5,-8 43 33,-9 5 4,-14 4 5,-15 7-166,22-5 0,0 1 154,-2 1 0,0 0-33,-2-1 1,2 0 96,-13 4-88,12-5 9,22-5-12,8-3 9,2 1 352,-1 2-308,-1 5 122,-3 10-38,-4 12 37,-5 13 11,-3 14-98,9-27 0,1 3-6,1 8 1,2-1-37,1 16 3,9-20 0,5-2 13,19 5-61,-5-17 1,4-1-264,19 1 0,5-3-1350,-1-3 1,4-3 1629,-3-4 0,2-1 0,-5-2 0,-10-1 0,-2-2 0,-1-1 0,0-1 0</inkml:trace>
+  <inkml:trace contextRef="#ctx0" brushRef="#br0" timeOffset="62905">18364 8586 14449,'-4'-2'6088,"0"1"-2251,4 1-3720,-44-12 23,33 9-28,-29-10-39,50 11-39,4 1 27,25-4-27,-2 2 0,20-3 10,-7 1 24,-7 0-35,-14 3 102,-8 1-74,-15 1 46,-2 0-45,-4 0 11,-1 5-6,-2 5 11,-1 10-16,2 11-1,0 11-27,2 11-637,3 10 617,-1-28 0,2 1-17,0 3 0,1 1-8,0 0 0,0 0-14,-2 0 0,-2-2-54,-5-1 1,-3-3-249,-5-3 0,-4-2-219,-5-3 0,-3-4-1022,-19 10 952,8-18 0,3-3 0,9-2 0,-13-2 0</inkml:trace>
+  <inkml:trace contextRef="#ctx0" brushRef="#br0" timeOffset="69352">3835 8908 21063,'4'-26'1547,"-1"5"-1262,-3 18-77,-2 0-96,-3 3-73,-7-1 6,-8 5-12,-9 2-3374,-16 7 3363,11-4 12,-13 3 38,19-7-16,-7-1 40,2-1 55,2-3 22,-5 0-122,12 0 3470,-6 0-3409,13 0-17,-1 0-28,6 0 45,5 0-73,4 1 320,2-1-303,-1 0 0,-2 0-28,-3 0-12,1 0-4,-1 0-1,2 0-22,0 0 55,1 2-38,3-1 0,0 2-6,0 0 22,1 1-11,-2 3-5,1 0 39,-3 1-29,1-1 29,-3 3-17,-1-3 11,-1 3-10,1-2 10,-1 1-33,3-4 5,0 0-5,2-2-12,0 1 12,0 0 22,-5 5-6,4-4 12,-2 4-23,2-5 11,3-1 577,1-3-531,-2-4 10,1 1-11,0-4-50,-1 5 22,1 0-16,0 2-12,1 3-34,0 4 23,0 6 0,0 9 0,0-5 0,-3 20 0,1-19 34,-4 20-17,1-4 0,0 2-1,2 6-27,3-10 17,2-8-12,1 3 23,1-6 0,1 3-6,0 3 6,-2-8-12,1 0 18,-2-5 5,2-4-11,0 0 16,4-2-5,2-4 45,6-2-28,-1-1 28,17-2-51,-3-1-16,18-2 27,1-1-22,3 2-22,-9 0 22,8 2 1,-7 1-12,-10 0 0,1 0 5,23 0-477,-24 0 0,-1 0 483,7 0-11,5-1 34,0-1-23,-1-1-6,-1 1-16,-20 0 6,-10 2 27,-7 0 962,-6 0-934,-6 2-16,-9 3-23,-11 3-17,0 0 23,-21 5-11,13-6-1,-18 4-16,8-4 17,-4 1 27,-5 0-33,-2 1 0,1-1 6,5-4-1,9-2-5,6-1-11,6-2 11,9 0 34,-8-2-40,16 1 17,-11 1-11,13 1 12,-2 0-12,5 0-12,-1 0 29,4 0-6,0 0 12,2 0 10,2 0-49,-2-7-12,-1-1 44,-2-8-10,-2-3 0,1 3 22,-7-17-28,3 6 22,-6-14-22,2 4-6,0-3-10,0-2 4,2-3 46,3 2-23,3 3-5,2 5 5,4 4-11,-1 4 0,1 3 0,0 2 11,0 3-22,0 1-11,-1 2 55,0 1-5,1 1-33,-1 2 5,1 3-17,1 2-28,2 3 17,2 2 34,5 1-18,4 0-10,6 1 61,5 0 0,7-2-39,9-2 17,9-3-378,8-2 361,-25 3 0,-1 0 6,2 0 0,0-1-12,0 1 0,0 0 6,-2 0 0,-1 1-31,24-5 36,-10 2 1,-11 2-17,-8 3 11,-9 2 0,-4 1 337,-3 0-348,-2 0 44,0-1-17,1-2 12,-1-1-11,0-3-22,0 1 5,-4 1 5,-1 0 18,-2 2-23,-4 0-17,-5 1 39,-7 0-27,-11 4-29,-8 3 40,-5 2 38,-14 7-49,16-6-12,-17 5 6,13-5 0,-16 3-109,25-5 0,0-1 117,-2 1 0,-1-1-14,1-1 1,1 0 5,-25 3 22,12-2-6,13 0-33,11-2 6,10-2 39,5 1 16,6-2-167,-1 1 56,2 2-276,1 4-2755,1 8 3109,1 0 0,0-3 0,-1-6 0</inkml:trace>
+  <inkml:trace contextRef="#ctx0" brushRef="#br0" timeOffset="76396">4539 10016 19137,'1'-5'4458,"0"0"-3058,-1 5-1192,-1-31-46,-6 39-27,-5-15-51,-7 51-56,3-6 34,-2 22-74,12-20 12,7 14-11,15-21 0,13-11 22,0-11 45,20-11 67,-19-11 34,11-11 17,-21-10 44,-10-8-27,-10-4-102,-5 7 79,-16-18-73,3 21-11,-11-12-56,8 22 6,4 11-79,4 7-134,4 9-443,1 9-1988,3 9 2610,6 11 0,-1-13 0,6-2 0</inkml:trace>
+  <inkml:trace contextRef="#ctx0" brushRef="#br0" timeOffset="76848">6810 9977 24559,'3'-45'903,"1"0"1,-1 6 0,-1 6-546,-3 14-184,1 11-107,-2 9-17,-2 12 1,-1 12-18,-5 16-27,-3 12-82,5-20 1,-1 1-634,0 4 0,1 1-1215,0 4 0,1-1 1283,2-4 1,0-3 0,1 12 0,4-22 0</inkml:trace>
+  <inkml:trace contextRef="#ctx0" brushRef="#br0" timeOffset="77513">8423 10016 26799,'6'-36'174,"-2"10"-152,-4 31 57,0 3-23,-3 0 16,-1-2 35,-4-1-6,-2-3-12,0-9 12,-1-9 56,5-26-129,2 9 33,10-19 1,7 22-40,7-1-33,4 11 17,1 9-23,1 10 6,1 11 22,0 8 6,-1 12 0,-8 7-62,-8 6-17,-18 7 11,-2-21 1,-5 1-70,-18 14 0,-4 0-417,10-12 0,-3 0 525,-1 0 1,-4 2 0,2-4 16,-2-2 1,1-3-242,-4 3 1,0-3 347,-17 4-11,24-25-28,22-19-12,22-12 1,13-6-45,12 2-1,6 6 7,3 6-74,4 8-128,-15 8 0,0 2-185,17 3-575,-12 2 1,1 3 508,-9 1 1,-2 1 0,14 2 0,-6 1 0</inkml:trace>
+  <inkml:trace contextRef="#ctx0" brushRef="#br0" timeOffset="78156">10279 10028 22961,'-12'-47'390,"1"-1"1,2 6 0,7 4-50,25 1-285,-1 15 0,32-4-39,-26 19 895,29-1-890,-15 15-16,10 6-20,-23 4 0,-2 2-8,8 20-18,-9 14 7,-25-17 10,-20 11 46,-13-9 139,10-16 0,-2 1-129,-3-1 1,-1-2 78,-13 5 127,9-7 2,14-19-169,13-4 611,0-9-527,10 0 18,8-6-135,-2 6-5,12 1-6,-1 8-23,25 3-5,1 8-22,13 8-12,-21 1-66,4 9-24,-19-1-60,-3 13 122,-23-6-56,-18 4-117,-23-12 17,3-6-544,-21-4-924,9-8-3230,15-3 1,1-1 2457,-8-1 0,9-2 1,29 2-1</inkml:trace>
+  <inkml:trace contextRef="#ctx0" brushRef="#br0" timeOffset="78672">12173 9908 20879,'0'-5'4503,"0"1"-4099,0 4 419,12-71-448,-4 46-308,-1-15 0,2 5 169,-1 25-164,-4 10-32,-2 4 60,-2 14 12,-9 24-56,-3 9-42,2-16 0,0 0-6,1-3 1,2-1 8,-4 28-17,8-9 11,7-17 6,11-7 22,1-18 12,11-12-18,3-15 46,8-16 5,4-6-51,-8 7 40,-10 10 0,-1 2-28,-1 1 55,16-12-83,-26 24-6,3 0 45,-10 26-50,-2-5-12,-2 25 12,-6-3-51,0 0-123,-4 13-1013,3 8 10,4-8 492,8-8 1,3-4 0,-3-13-1,8 11 1</inkml:trace>
+  <inkml:trace contextRef="#ctx0" brushRef="#br0" timeOffset="79306">14526 9805 21271,'-4'-2'3635,"1"1"-2425,3 1-1115,-67-12-22,35 12-37,-13-5 1,-3 2-314,1 10 322,-10-1 17,-4-2 33,5-3 51,8-4 116,12 0-183,15-1 167,7 0-134,9 3-84,1-1 11,3 3 244,-1 4-266,0 0 44,-3 9 34,-1 9-22,-2 5-28,-2 10-56,-1-1 5,3-7 1,-4 6 27,3-9 6,-5 11 11,5-14 23,1-3-6,5-14 196,1-5-118,4-8-67,3-6-22,6-8-6,7-5 29,10-2-29,7 3-45,-6 5 73,17 3-54,-16 11-20,12 2-10,-9 13-22,-3 9-17,-1 10 45,-4 6 16,-10-6-133,-9 15-63,-18-12 74,-3 5-231,-26-4-352,12-18 0,-2-3-726,-1 1 1,0-2-3491,-5-2 1,2-2 3146,-4-3 1,18-5 0,16 1 0</inkml:trace>
+  <inkml:trace contextRef="#ctx0" brushRef="#br0" timeOffset="79840">15715 10060 24771,'15'-52'560,"0"0"1,-2 5-1,-3 8-168,-4 14-95,-3 10-112,-8 8-73,-7 7 5,-12 11 1,-13 11-45,-8 13-359,20-12 0,1 2 286,0 3 0,0 2 8,3 2 0,1 2 17,2 1 1,3 0-32,3 0 1,4 0-29,3-3 1,4-1 5,14 25-56,15-11 62,13-14 44,7-12-5,-1-19 11,-5-16 17,-8-11 39,-10-7-39,-10-1-23,-14-4-5,-7 15 579,-15-4-596,-7 20 87,-10 1-76,-4 8 6,3 6-51,7 5-94,8 5-298,10 0-800,9 1-2538,18 0 3764,6-5 0,-2-5 0,-3-5 0</inkml:trace>
+  <inkml:trace contextRef="#ctx0" brushRef="#br0" timeOffset="80173">16523 9916 20492,'-2'-3'4498,"0"1"-3137,2 2-952,28-69-118,-6 45-179,0-15 0,2 4 39,9 26-33,0 5-28,0 12-57,0 11-27,-3 16 11,-3 15-271,-16-20 0,-2 1 176,-2 2 0,-2 1-124,-1 1 0,-3 0-280,-4 0 1,-1-1-631,-2-1 0,-2-1-7278,-14 28 8390,1-16 0,8-19 0,6-13 0</inkml:trace>
+  <inkml:trace contextRef="#ctx0" brushRef="#br0" timeOffset="80340">16573 10145 25511,'33'-42'-411,"0"1"0,1 3 1,3 8-1937,1 21 0,2 5 1970,-3-1 1,-3 1 0,14 0 0,-22 1 0</inkml:trace>
+  <inkml:trace contextRef="#ctx0" brushRef="#br0" timeOffset="81305">17526 9915 16084,'0'-11'7181,"0"3"-6587,0 8 952,0 0-1311,-30-15-17,9 25 12,-35 5-168,23 26-18,1 12-21,17-17-23,8 4-11,13-11-45,10 4-17,24-6 67,-2-11 6,4-5 28,-11-11 6,-12-6 67,-2-11-29,-10-6-44,-11-10-5,-4 8-1,-10-13-5,3 1-3370,-2-20 3353,8 17-1,6-13 46,6 35 50,5-6 6,-2 18 22,3 1-67,-3 5 3375,5 11-3419,-5-1 129,7 15-141,-2-2-23,6 11-83,3 0-611,5 12-913,-6-8-33,-2-2 1663,-9-3 0,-5-22 0,-2 5 0</inkml:trace>
+  <inkml:trace contextRef="#ctx0" brushRef="#br0" timeOffset="81715">18195 9868 20778,'2'-6'3921,"-1"0"-3058,-1 6-180,-9-60-538,0 43 54,-10-17 0,-4 6-143,1 29 39,-27 8-72,29 3-1,-14 18-16,17-3-18,-2 12 7,18-6-12,14-4 23,2-10 38,23-4-32,-15-11 200,28-14 85,-22-5 84,12-12-174,-17 8 129,-2-1-116,-7 8-220,-4 3 0,-4 4 0,-6 13 0,-2 11 0,-2 17 0,-1 0 0,-2 3 0,-1 3-133,2-6 1,-1 2-1037,-3 21 1,0 2-3748,1-4 1,2-3 3561,1-11 1,0-4 0,0 17 0,3-40-1</inkml:trace>
+  <inkml:trace contextRef="#ctx0" brushRef="#br0" timeOffset="83015">4409 8880 23937,'46'-25'-32,"0"-1"0,1 2 1,0 3-207,-2 10 0,0 2-872,1 1 1,-1 1-9,-1 1 1,-3 2-1451,-6 1 0,-4 3 2657,9 7 0,-21-3 1,-15 3-1</inkml:trace>
+  <inkml:trace contextRef="#ctx0" brushRef="#br0" timeOffset="83171">4791 8799 12208,'-7'0'9522,"2"0"-5898,5 0-3254,-46-2 11,34 19-157,-34 11-151,44 29-85,0-22 1,0 2-624,-2 5 0,0 2-673,1 5 0,0 0 1308,1-4 0,0-3 0,1 15 0,1-25 0</inkml:trace>
+  <inkml:trace contextRef="#ctx0" brushRef="#br0" timeOffset="83990">6538 8878 25029,'38'-27'10,"1"1"0,0 0 0,0 1 0,-1 1 0,-2 6-72,-4 8 1,0 2-433,8-1 1,0 1-588,20 0-815,-21 3 0,-1 2-1005,5 3 1605,-21 6 1139,-31 1 697,-27 5 962,-2-3 621,-8 2-85,8-3 590,7-3-1564,13-2-694,6-3 101,9 0-79,1 4 201,0 13-352,0 9-107,-2 17-94,1-5-1,-1 20-337,-2 0-428,3-10 1,0 2-3042,1-4 1,0-1 3766,2 4 0,0-4 0,1 2 0,3-22 0</inkml:trace>
+  <inkml:trace contextRef="#ctx0" brushRef="#br0" timeOffset="84556">8364 8948 18352,'-3'-3'5025,"1"1"-3659,2 2-1321,5-62-50,32 33-29,-16-9 0,5 2-480,13 21 1,4 6 317,-2 0 0,-1 2-112,1-1 0,-1 2 53,19-1-1470,-3 2 739,-38 4 466,-9 1 352,-31 3 291,-17 1 22,4 1 679,-21 0-393,28-3 1098,-22 2-666,32-2 374,-3 3-957,13 0 588,3 16-341,2 4-135,-2 20-140,0 9-736,-2 9 517,4-27 1,0-1-28,-3 22-115,4-20 0,0 0-1023,4 2 1,1 0 1131,3 3 0,1-2 0,2 21 0,4-28 0</inkml:trace>
+  <inkml:trace contextRef="#ctx0" brushRef="#br0" timeOffset="85106">9689 8906 23439,'45'-27'166,"0"0"1,0 1 0,8-3 0,0 2 0,-4 4-1128,-10 9 0,-1 3 893,22-7 1,0 1-126,-19 8 0,-2 2-185,10-2 0,-1 1-309,-5 3 1,-2 1-818,-7 1 0,-4 2-3668,8 3-2009,-34 7 7181,-13 0 0,-29 4 962,4-4 2432,-8-1 2644,6-3-2072,9-3-1323,8-3-895,7-1-555,3-2-386,4 0-331,2 1-179,1 4-6,-1 8-5,-3 10-68,-3 14-83,-3 10-79,0 11-243,7-23 1,-1 1 155,0 5 1,1 0-527,1 4 0,0 0-172,1 3 1,2 0-1949,0 0 0,2 0 2677,1-6 0,1-3 0,1 9 0,0-21 0</inkml:trace>
+  <inkml:trace contextRef="#ctx0" brushRef="#br0" timeOffset="85739">11617 8948 23175,'47'-30'31,"-1"-1"0,1 1 1,-1 1-1,-1 2 1,-1 6-44,5 7 1,0 6-397,1-2 0,0 0 290,-1 1 1,0 0-144,-3 2 1,-2 0-191,-5 2 1,-2 0-620,17 1-1428,-22 2-800,-26 7-1334,-24 2 1753,-18 5 2005,-15 0 1927,-6-2 1888,2-3 1142,7-4 367,11-1-1857,11-4-783,9-1-539,5-2-364,4 1-246,1 0-117,2 2-427,1 2 174,1 6-16,0 7-74,-1 12-94,-1 11-102,1 10 7,2 8-540,0 8 293,2-28 0,0 0-636,1 2 0,0 0 871,1 5 0,0-3 0,1 5 0,1-4 0</inkml:trace>
+  <inkml:trace contextRef="#ctx0" brushRef="#br0" timeOffset="86323">13753 8993 21898,'1'-52'1217,"0"0"1,0 5-1,-3 9-948,-3 19 157,-2 4-152,3 8 1,1 0-208,1 3 11,2 2 17,0 2-83,2 4-1,-2 0 34,1 8-12,-6 3 12,-4 8 5,-1 6-27,-1 13-29,5-12 23,3 13 11,8-6-17,-2-7 45,6 24-56,-7-29 11,1 22-167,-6-17-404,0 7-992,-2-6-3864,5-7 5416,6-10 0,-2-7 0,1-6 0</inkml:trace>
+  <inkml:trace contextRef="#ctx0" brushRef="#br0" timeOffset="86564">13639 8835 16532,'-9'-1'5175,"3"0"-4197,-25-5 0,-4-1-183,13 3-535,-15-4 1,5 2-88,25 4 108,12-1-7,21-2-207,12-1-84,-8 1 1,4 0-74,2 0 1,2-1-377,8-1 1,0 0-690,-6 1 1,1 0 1154,1 0 0,4-1 0,-7 2 0,7-1 0,-11 1 0,1 0 0</inkml:trace>
+  <inkml:trace contextRef="#ctx0" brushRef="#br0" timeOffset="87305">15358 9036 14841,'-6'-5'6950,"2"2"-5694,4 3 592,0 0-1445,-55-43-235,54 29-89,-30-33-46,92 36-38,-13 4-26,-6 1 0,0 1-86,15-4-164,-22 5 1,0-1-123,20-4-179,-16 1-308,-19 2-6,-17 0 419,-15 0 354,-12 0 184,-8 1 431,-2 1-144,1 0 100,6 2 79,7 1-18,9 0-83,7 1 50,3 2 22,1 3-60,0 5-237,0 2 281,0 19-292,-1 1-117,-1 20-50,-3 2-345,-2 8 213,3-28 0,0-1-182,-2 22-1250,3-14 1,1-1 1540,7 17 0,-4-4 0,6-24 0</inkml:trace>
+  <inkml:trace contextRef="#ctx0" brushRef="#br0" timeOffset="87680">16367 8980 25427,'24'-40'30,"0"0"0,0 3 0,2 8-148,23 17-252,1 4-448,-3 3-817,-5 3-1725,-11 1-4566,-13 3 7926,-11 1 0,-7-1 0,-2 0 0</inkml:trace>
+  <inkml:trace contextRef="#ctx0" brushRef="#br0" timeOffset="87872">16584 8831 24749,'-29'-2'711,"9"31"1,6 10-684,13 5-396,-2 5 0,2 1-13,11 0-660,3-1-2292,0 0 3333,-5-1 0,-4-21 0,-3-6 0</inkml:trace>
+  <inkml:trace contextRef="#ctx0" brushRef="#br0" timeOffset="88413">17106 8890 24111,'-2'-32'162,"11"4"-207,36 17-72,5-1-107,0 4-146,-3 1-190,-12 3-106,-14 3 105,-13 0 247,-14 1 281,-8 0 184,-7 0 118,0-1 140,2 0 526,1-1-610,7 1 291,0 0-117,6 0-180,2 0-112,1 4 79,1 4 11,0 10-95,-1 12-62,-1 11-34,2 21-112,1-16-44,0-12 0,0 0-387,1 12-975,0 13-3713,1-4 5125,-1-10 0,0-23 0,-1-14 0</inkml:trace>
+  <inkml:trace contextRef="#ctx0" brushRef="#br0" timeOffset="88848">17693 8819 24934,'45'-16'39,"1"-1"0,-2 2 0,-1 2-36,-8 7 0,-2 1 25,18-3-6,-8 1 23,-28 4-39,-13 1 33,-13 1-11,1-1 22,-12 1 69,7 0 65,-2 3 80,6 1 44,3 3 128,1 6-195,1 4-28,-1 9-112,1-4 56,-1 16-68,2 3-33,1 15-104,3-15 1,0 0-127,1 17-478,1-15 0,1 1-27,-1-9 1,0-3-1,2 14 1,-3-5 0</inkml:trace>
+  <inkml:trace contextRef="#ctx0" brushRef="#br0" timeOffset="93149">4579 9133 18487,'-42'-9'1348,"-1"1"0,5 0 0,9 1-715,18 2-274,6 1-203,6 1-83,6 0-22,9 0-40,13 0-11,18-2-62,-14 2 1,3 0-791,7-1 1,2-1-264,8-1 1,-1 1 1114,-3 0 0,-4 0 0,16-1 0,-28 3 0</inkml:trace>
+  <inkml:trace contextRef="#ctx0" brushRef="#br0" timeOffset="93965">6875 9069 21943,'-20'-14'796,"8"1"-662,33 6-84,7-1-33,11 0-11,8-2-17,4 1 5,-1 0-5,-8 4 39,-15 2-6,-14 1-22,-20 2 28,-12 0-22,-15 4-6,-10 2 0,-6 4 0,-2 2 17,2 2 16,2 0-22,2 3 1,19-7-1,3 2 34,19-8 55,3-2 29,10 0 62,23-11-163,-4 3-6,33-14-67,-7 3-427,-17 6 1,1 1-246,0 1 0,0 1 717,1 1 0,-4 2 0,6-1 0,-11 5 0</inkml:trace>
+  <inkml:trace contextRef="#ctx0" brushRef="#br0" timeOffset="94968">4282 10790 16744,'39'-19'-93,"0"0"0,1 0 0,-1 1 0,0 0 0,0 3 45,9 1 1,-2 3 396,-9 1 1,-1 2-493,4 0 0,-5 1 391,-7 3 15,-11 5 12,-46 10-79,-10 3 0,-4 0-110,10-3 1,0 1-748,-24 7 0,1 0 896,2 1 143,3 0 0,-1 0-377,23-6 1,0-1 82,-9 5 0,4-1-73,2 2-67,19-4 28,17-11-274,36-2-353,18-12-807,-8 2 0,6-2 1462,-11 1 0,2-1 0,-5 1 0,-2 0 0,-4 1 0,3 0 0,0 0 0</inkml:trace>
+  <inkml:trace contextRef="#ctx0" brushRef="#br0" timeOffset="95408">6494 10605 17249,'-11'2'2711,"3"-1"-2044,8-1 503,0 0-1142,-26-3-34,39-1-5,-23-2-3,40-3 0,17 2 9,-8-1 5,-3 0 0,0 1-56,5 1 78,-20 2 40,-4 6-57,-47 11-5,2-2 14,-4 1 0,-3 0-314,-18 6 333,19-6 1,0 0 50,2-1 0,1 0 219,-22 9-56,15-6-40,16-6 51,22-5-90,21-9-146,21-5-106,-12 2 0,2 0-356,5-1 1,1 0 291,8-1 1,-2 2-1,5-1 1,-4 2 0</inkml:trace>
+  <inkml:trace contextRef="#ctx0" brushRef="#br0" timeOffset="98635">8481 11369 17479,'0'-7'5668,"0"2"-4822,0 5-292,0 0-201,-4 5-224,4 15-1747,-2 17 1,0 7 1597,1 1 1,0 1-29,0 9 0,-2 3-1037,0-8 1,0 2-1,-1-6 657,1-8 0,0 2 211,0 19 0,-1 9 0,2-13 1,0-4-1,1-6 0,-1 0 1</inkml:trace>
+  <inkml:trace contextRef="#ctx0" brushRef="#br0" timeOffset="99018">8467 11413 20335,'-49'4'181,"1"1"0,2 0 1,6 6-82,1 26 789,1 4-822,3 2 45,4-5 670,6-9-256,8-13 208,7-15-264,7-26-351,5 2 127,11-30 45,7 7-148,-3 17 0,1-2 0,3 0 0,2 2 152,4 1 0,1 2-245,1 3 1,2 2-23,1 5 0,1 2-20,0 5 0,1 3-5,1 5 0,0 4-54,1 4 1,-1 5-320,-1 4 1,-2 4-371,-1 3 1,-4 4 739,-2 6 0,-4-1 0,2 4 0,-8-1 0</inkml:trace>
+  <inkml:trace contextRef="#ctx0" brushRef="#br0" timeOffset="112920">8261 8975 15126,'-35'-11'1272,"5"3"-684,23 10-90,-4 3-268,0 0-96,2 2 12,2-3 168,4 0 235,1-2 1232,2-2-1574,8-6-33,10-5-141,2-2 23,21-8-17,1 3-28,-12 7 1,1 0-199,2 0 0,0-1 195,1 1 1,0 0-7,-1 1 1,-1 0 20,26-8-1,-18 5 57,-3 2 49,-24 6 18,-1 2-56,-11 2-118,-2 0-45,-6 1 379,-6 0-356,-11 5 22,-7 2 11,-9 5 12,-5 1 10,-5 2-22,-3-1 17,-2-2 23,5-1 16,8-4 34,12-2 11,13-3-23,9-2-38,5-1-34,7-3 11,7-4-23,12-3-16,13-2 39,12-3-22,4 0-29,1 2-212,1-3 73,-20 8-437,4-1-538,-22 7-723,-1 1-2094,-8 2 3982,-11 3 0,2-3 0,-5 3 0</inkml:trace>
+  <inkml:trace contextRef="#ctx0" brushRef="#br0" timeOffset="113228">8461 8813 19848,'-14'20'1613,"-2"7"-1064,4 11-95,-1 10-84,3 10-3010,6-16 0,2 0 2735,-1 17-19,4-16 0,1-1 1322,2 11-1253,2 8-21,-1-10 883,-2-10-884,-2-12-11,0-11 201,0-8 3168,0-7-3263,0-2-118,2-6-683,1-3-1416,4-5-1277,0 0 2428,5 0 0,-8 7 0,1 0 0</inkml:trace>
+  <inkml:trace contextRef="#ctx0" brushRef="#br0" timeOffset="114093">8298 13583 19776,'-5'-56'776,"1"0"0,-1-1 0,1 8 1,0 1-1,1 10-423,0 4-236,1 19-49,-1 30-63,1 1-27,-4 37-185,1-2-157,2-15 0,1 3-1614,-1 10 1,3 0-2939,2-6 1,0-2 3832,0-3 0,0-3 1,4 0-1,-5-26 1</inkml:trace>
+  <inkml:trace contextRef="#ctx0" brushRef="#br0" timeOffset="114443">8492 12933 20985,'-23'34'84,"0"1"0,6-3 0,10-5 50,33-7-44,3-7 140,1-16 72,-5-11 113,4-13 95,-8-12 212,-11-19-531,-9 18 117,-16-14-101,-6 26-84,-7-1-73,-1 11-72,5 11-45,6 16-219,6 11-537,6 15-987,13 8-3555,12 5 4517,9-6 0,-8-16 0,-6-11 0</inkml:trace>
+  <inkml:trace contextRef="#ctx0" brushRef="#br0" timeOffset="114794">9114 12803 19776,'-3'-5'3954,"2"2"-3831,-29-5 0,-8 7 152,3 19-225,-9-9 0,0 9-42,20 25 1,8 9-2285,0 1 1,3 3 2269,-1 1 1,2 4-35,5-11 1,1 2 0,1-1-120,0 0 1,2-1-1,0 4-134,0-3 1,1 2-1,0 2 1,1 2-645,1-1 0,1 2 1,0 2-1,1-1 1,-1-1-1522,0 6 0,0-1 1,0 0-1,0-2 1576,2 0 0,0-1 0,0-2 0,-2-2 882,-3 7 0,-1-3 0,-4-7 2504,-3-6 0,-5-5 450,-4 2 1,-8-11-1135,-7-23 1,-1-13-1079,4-14 0,3-9-417,-1-3 0,4-5 182,7-20 0,7-6-171,4 4 0,5-1-449,2 8 1,3-2 0,2 0 164,2-1 0,3 0 1,4 0-34,1 7 1,4-2 0,2 2-1,-1 2-27,6-6 1,0 2 0,2 2-18,-1 2 1,1 0 0,1 4-234,13-9 1,1 5-133,-8 12 1,1 1 389,14-10 0,-1 4 0,-22 15 0,-2 2 0,23-13 0</inkml:trace>
+  <inkml:trace contextRef="#ctx0" brushRef="#br0" timeOffset="115460">10896 13327 18218,'4'-42'1366,"-1"-1"1,0 1 0,1-15 0,-1 6-874,1-8 369,-4 15-649,-2 33-84,-1 13 11,-1 26-28,0 26-84,0-2-557,2-12 1,-1 3 528,1-5 0,-1 4-70,0 13 1,-1 8 0,1-5 19,0-2 0,1-1-960,0 5 1,-1 6 0,3-11 986,1-21 1,2-3-32,1 19 0,0-3 115,1-11-22,-7-4-27,-10-52 4,-8-29-10,4-5-1,4-5 1,1-4-53,3 11 0,0-1 32,1-1 0,0-3 0,1 2 4,-1-3 0,2-1 7,1-1 0,1-4 0,1 4 13,1 16 1,1 3-1,0-2-5,0-6 0,1-2 0,1 1 7,3 0 0,1 1 0,3 4 6,1 4 0,3 1-6,5-13 0,3 3 1345,-2 20 1,3 6-1334,23-9 107,4 17-147,3 16-6,1 17-1018,0 16 979,-14 2-140,-16 1 1,-5 3 44,-5 3 125,-11 10 0,-8 1-24,-9-22 0,-4-1 31,-9 13 0,-5-1-45,-1-11 0,-1-5-168,-1-3 0,1-4-547,5-5 1,0-3-903,-9-3 1687,16-26 0,17 10 0,4-10 0</inkml:trace>
+  <inkml:trace contextRef="#ctx0" brushRef="#br0" timeOffset="115969">11629 12561 24312,'22'39'45,"8"1"-56,19-4-746,-3 5 734,-14 0 273,-17-3-233,-22-6 138,-14-8-76,-11-11 117,-1-6 56,10-11-84,11-4-73,14-8 318,7 2-385,30-15-16,1 5-10,-9 6 1,1 0-169,-3 2 0,-1 0 189,26-17-12,-16 6 56,0-16 63,-22 14 161,0-10 95,-14 14-50,-7 6-78,-3 4-34,-1 5 242,1 3-421,3 5-40,0 10 1,2 12-40,1 17-5,0 15-39,3 10-319,1-28 0,0 1-46,2 1 1,0 0-502,1-2 0,1 0-2627,0-2 1,0-1 3570,5 16 0,-5-20 0,-2-14 0</inkml:trace>
+  <inkml:trace contextRef="#ctx0" brushRef="#br0" timeOffset="116151">12169 12264 20783,'-3'-6'2292,"0"2"-2981,3 4-1082,-3 8 1771,17 19 0,-13-13 0,14 10 0</inkml:trace>
+  <inkml:trace contextRef="#ctx0" brushRef="#br0" timeOffset="116903">12442 12661 20800,'-3'-3'4106,"2"0"-3042,1 3-1036,4-18-11,8 31-17,6-4 11,1 41-39,-4 5 28,-7 0 12,-7-6 4,-8-10 40,-2-13 12,-2-13-1,4-16 0,3-15 0,6-16 17,5-14-17,6-11 17,6-2 40,2 4-29,1 11-34,2 12-27,1 10-23,1 11 0,2 6-22,1 9 22,2 9-16,0 9-29,-3 9 34,-4 5-5,-9 3-7,-8 4 7,-7-15 16,-5-1 28,-3-19-16,0-4-12,1-13-6,3-9-5,6-11 17,4-4 17,6-1 16,6 5-5,5 4-34,2 7 28,4 5-16,0 8-23,2 6 5,0 11-10,11 13-1,-13-2-5,16 14 0,-12-11-12,7 2 1,-5-6 28,-8-10 22,-9-13-23,-7-12 18,-2-14-1,1-11-5,3-10 5,-3 18 1,0 0 61,10-19-23,-1 5 124,-5 20 17,-9 15-62,-2 5-118,-5 9 23,-6 13-17,-2 8-28,-3 12-56,4 8-224,9 5-689,18 3-2095,2-24 1,4-2 3063,4-2 0,0-3 0,15 7 0,-14-13 0</inkml:trace>
+  <inkml:trace contextRef="#ctx0" brushRef="#br0" timeOffset="117859">14507 12479 23831,'46'-32'0,"-1"1"0,1 0 0,-1 2 0,0 1 0,-1 6-539,0 11 1,0 4 504,7-2 1,-1 1-23,-16 3 0,-1 1-8,3 0 0,-3 2 19,-4 10 275,-38 12-196,-40 12-23,-5-2 36,2-4 1,-2-1 5,16-8 1,1 1-888,-18 9 0,2 0 862,2 0 17,12 3 455,35-17-466,7-1 134,20-2-162,34-7-29,-23-3 1,1 0-209,12-2 0,1-3 233,-6 0 1,-2-3-6,-1-2 1,-4-1 13,16-8 1820,-4-23-1730,-32 2-3,-8 8 0,-4-2 75,-7-1 1,-3 2 67,-8-24 48,3 23 0,0 1 511,-8-20-447,3 8-168,3 8-135,11 26 34,20 46-79,-4-5 1,1 4-199,6 12 1,-1 4 116,1 6 0,-1 2-226,-6-3 0,-2 1-656,-1 7 0,-3-1-154,-2-9 0,-2-1 1112,-1 9 0,-1-9 0,-1-25 0,0-6 0</inkml:trace>
+  <inkml:trace contextRef="#ctx0" brushRef="#br0" timeOffset="119436">14073 14559 21108,'-11'-57'1124,"0"0"0,1 5 0,1 5-676,-4-10-173,4 19-147,6 17-43,3 16-23,4 17-18,3 15-10,3 18-28,0 13-1,-6-26 1,0 1-18,0 2 1,-2 0 0,0 0 0,-1-1 17,-1 27 5,-7-13 22,-3-19 12,-3-20 39,-3-35-28,2-13-22,2-12-266,7 16 0,0 0 268,3 0 1,1-1-463,0-10 1,1-1 447,2 10 1,2 0-1,5-11 1,5 2-392,13-5 383,-7 16 0,4 3-14,21-1 28,6 15-5,2 13-7,0 18 18,-5 16 218,-10 17-241,-24-18 1,-4 3-29,-2 1 0,-4 1-8,-3 0 0,-3-1 856,-7 28-842,-5-10 34,0-15 434,3-16-441,3-16-4,4-18-7,5-16 6,7-13 29,5-8 16,6-3-12,2 4-32,2 6-1,3 10 0,-4 14 245,21 5-284,-8 10-34,22 4-22,-7 13-95,0 9-174,-3 11-196,-3 7-303,-3 1-529,0-1 126,2-8 29,5-10 223,6-11 594,1-15 555,-24-5 0,-2-3 122,9-8 449,1-19 190,-26 10 1,-3-11-68,-5 1-73,-10 2-151,-3 7 75,-9 8-394,-3 11-95,-4 9-73,-1 10-56,1 7-34,1 8-16,5 6-35,5 3-10,6 3-34,4-1-11,10-5 50,10-7 17,10-9 34,7-10 27,0-12 23,-1-9 168,-2-12-134,-14 10 162,-3-6-23,-12 15-77,-6-2-68,-3 7-40,-5 4-27,-1 9-22,1 5-12,2 8 6,3 7-23,3 4-22,8 3-6,8 0 1,12-5 5,14-5 0,13-7 0,9-7-260,2-12 305,-9-10-17,-11-11 23,-15-8 5,-12-8 11,-7-3 17,-7-4 11,-1 2 6,-1 4 276,0 6-282,4 6-11,5 7-17,6 8 28,12 6-50,-7 7 28,12 10-6,-11 8-28,5 11 1,-2 7-18,-3 6-22,-1 2-17,2-2-196,13 3-44,6-14-372,5-6 147,18-17 202,-31-8 0,0-3-31,10-2 0,1-2 22,-1-5 1,0-2 103,-5-2 1,-3-2 142,-7-1 0,-4-3 84,4-23 182,-23-3 129,-15-6-424,2 25 0,-1-2 295,1-2 0,1-1 20,2-1 0,2 0 12,2 4 1,1 1 286,4-18 334,1 18-681,-1 17-21,-2 12-52,0 13 632,0 12-632,0 15-27,1 13-29,0 13-269,-1-28 0,0 1 182,1 2 1,0 0-93,0 0 0,1-1-205,0 0 1,1-1-410,2-2 1,1-2-4058,11 23 4000,2-15 1,-7-19-1,-6-12 1</inkml:trace>
+  <inkml:trace contextRef="#ctx0" brushRef="#br0" timeOffset="119736">16673 13707 20481,'0'-4'3747,"0"1"-2436,0 3-1216,-30 4-67,14 6 17,-36 17-28,16 10-134,14-13 1,1 0 155,-17 21 29,14-5 32,14-7 1,21-4-22,15-4-57,21-1-160,-18-13 0,4-1 54,18 0 0,2-1 19,-16-3 1,3-1-429,11-1 0,7-1 0,-7-1-821,-11-1 0,0-1 1314,17-2 0,6-1 0,-10 1 0,-2 0 0,-12-2 0,-1 1 0</inkml:trace>
+  <inkml:trace contextRef="#ctx0" brushRef="#br0" timeOffset="120818">18395 13737 19356,'0'-6'2145,"-4"-26"0,-1-4-1753,-1 12-104,-2-15 1,-3 2 97,-10 20-5,-24 5-297,11 10 8,-3 12 1,2 4-48,1 6-14,2 1 0,1 4 8,-6 17-28,13-9 0,2 1-16,-6 13-9,14-13 0,6-2-14,12-6 16,4 4 1,23-21 47,0-16 1,1-4-3,14-4-146,-7-5 0,-2-5 269,-1-15 73,2-10 44,-10 3-5,-10 6-23,-7 11-111,-6 13-74,-2 12-38,-6 9 27,-4 17 12,-10 25-46,-2 10-252,9-18 1,1 0 238,3-5 0,2-2 306,1 16-309,21 3 5,10-26-16,25 2-381,8-23 395,-26-9 0,1-4 0,1-6 0,-1-2-9,-8 2 0,-1-5 3,8-19 1,-3-6 7,-13 10 1,-2-3-330,-1 1 1,0-2 0,-3-1 328,0-14 1,-3-1 11,-2-1 0,-1-1-14,-2 0 0,0 0 2,-1 5 1,-1 2 5,-1 6 0,1 3 40,-1-20 411,-1 24-456,-1 21 0,-1 12 10,-7 22 370,2-3-369,-10 29 0,-1 4-15,3-3 1,0 5 101,3-3 0,0 2-116,0 12 1,2 1-500,5-7 0,3-2 469,4 0 0,5-2-12,4-3 1,5-3-9,6-4 1,5-4-214,5-7 1,4-4 201,2-6 0,3-6 11,0-4 1,1-7 27,-1-6 1,-1-7 16,-3-4 0,-1-6 17,-3-6 0,-3-5-428,-2-6 0,-3-3 428,-6 8 0,-2-3-3,3-12 0,-2-6 20,-7 14 0,-1-3 0,-1 0-6,0 0 0,0 0 0,-1-2 17,0-4 0,-1-1 0,-3 3 39,-3-3 1,-3 4 298,-3 10 0,-3 4-282,-11-8 867,-3 23-917,0 26 424,-1 19-447,-4 23 3,12-18 0,1 2-23,1-5 1,2 2 5,-6 22 1,2 3-104,7-14 1,2 1 26,-1-2 1,0 2 0,3 0-250,7 11 0,5-2-937,4 1 0,6-2 1265,12 4 0,2-5 0,-14-21 0,-1-2 0,4-5 0,-1 1 0</inkml:trace>
+  <inkml:trace contextRef="#ctx0" brushRef="#br0" timeOffset="121893">20636 13558 22866,'3'-59'647,"0"-1"1,0 7 0,0 11-508,1 21 70,1 19-165,-3 8 92,0 24-53,-5 10-40,-6 21-337,2-26 0,-2 1 293,-2 2 0,-2 0 2,-1 0 1,0 0-181,0-3 0,0-2 178,-10 24 39,7-19 6,8-18-1,5-19-27,4-20 6,8-16 5,6-17 47,-3 21 0,2-1-58,1-3 0,2-1-1,1-1 1,1-1 5,1 2 1,1 0-1,0 3 1,0 2-1,19-18 405,-2 14-404,-3 14-23,-2 11 17,1 12-12,1 9 6,0 12-5,-2 11-17,-5 9 0,-7 5-17,-9 1 0,-7-3 498,-10-9-487,-3-11 38,-3-11-15,2-11 0,4-13 5,7-10-22,8-12 16,10-7 12,8-3-11,7 1 5,1 9 0,-1 10-22,-3 10-17,-5 8 5,-2 9 23,-4 6-16,1 8-18,-2 4 12,1 1-29,2-3 18,2-6 33,1-7 0,2-10 5,0-11 12,2-11 11,-2-8 6,-2-5 5,-1-1 6,-5 4-17,-4 9-6,-7 11-11,-4 11 0,-5 11 6,-2 9-34,-1 10-5,1 5-6,2 9 22,4-15 1,8 6 5,7-19-3403,23-2 3397,-11-9 12,19-12-1,-18-12 23,6-10 34,-6-7 22,-7-3 5,-10-1 7,-6 4-40,-6 5-40,-4 9-77,1 9 3184,-1 8-3885,1 7-4408,1 14 5170,3-1 0,-2 3 0,2-9 0</inkml:trace>
+  <inkml:trace contextRef="#ctx0" brushRef="#br0" timeOffset="122519">22073 13614 25640,'23'-47'209,"0"0"0,1-2 0,-3 3-41,1-3-787,-10 14 1,0-1 668,-1-3 1,-1-3-9,0-15 0,-2 1-20,-2 16 0,0 0 45,1-19 1,-1 2 21,-3 24 1,-1 2 13,1-5 1,-1 2 569,-2-14-617,-4 26 179,-1 12-218,-7 22 22,-3 12-50,-5 19-3,9-14 0,0 5-1327,-4 16 0,1 1 1338,4-14 1,1 2-7,-4 18 1,3 1-315,5-20 1,2-1 288,2 9 1,2 1-130,5-3 1,6-2-34,11 2 0,3-4 114,-6-13 1,2-3-87,14 3 0,2-6-84,17-12 201,-20-10 1,1-4 42,-2-5 0,-1-6 27,5-12 1,-3-6-1,-8 0 1,-2-2-291,-1 0 1,-3-2 306,-4-6 1,-4 0 10,-2 7 1,-2 0 27,2-10 1,0 0 30,-3 2 1,-1 1 1305,-2 4 1,-2 2-1312,0 4 0,-1 2 140,-1-15 750,0 16-890,-1 15 196,-2 14-280,-4 15 935,0 4-946,-9 28-12,-2 9-403,6-16 0,0 2 403,0 4 1,1 2-15,0 12 0,2-1-16,3-17 0,1 0-107,0 14 0,3-1-455,3-19 0,1-2 15,0 7 1,1-1-2946,3 0 0,0-4-460,3 6 3507,-2-8 0,-6-28 0,-2-1 0</inkml:trace>
+  <inkml:trace contextRef="#ctx0" brushRef="#br0" timeOffset="122870">22619 13374 13569,'-3'-4'8413,"1"1"-5814,2 3-2672,-11-51-268,37 37-130,-4-37-89,39 51 79,-3 0 318,-13 0 6,4-6 241,-11-11 236,-1-6 189,-4-11-173,-17 10 403,-2-4 23,-10 11-50,1-2-130,-6 5-50,0 5-420,-1 4-73,-1 5 17,-2 10-33,-5 21-18,-1 10-21,-2 20-1171,6 0 1025,3-11-561,4 11-2956,7-1-1419,-1-12 4337,6 5 1,-9-40 0,1 0 0</inkml:trace>
+  <inkml:trace contextRef="#ctx0" brushRef="#br0" timeOffset="123052">23047 12963 23097,'-8'-38'-233,"1"0"1,-6-15-917,16 68-1342,1 16-937,1 0 2365,0 6 0,-3-22 0,-1 0 0</inkml:trace>
+  <inkml:trace contextRef="#ctx0" brushRef="#br0" timeOffset="123519">23169 13205 26172,'-15'45'53,"0"1"1,0-1 0,1-1 0,0-1 0,4-1-51,2 5 0,4-3-239,-1-7 1,3 0 235,6 21 0,3-3-644,2 1 641,2-8 0,1-2-14,0-6 336,-5-6-308,-9-30 4,-6-11 35,-4-31-22,1-7-37,4 11 1,0-2-186,0-5 0,0-2 202,1-3 1,1-1 13,1-2 1,1 1 16,1 1 0,1 1-20,0 2 1,1 1 14,2-20 115,1 23 0,3 2-121,11-5-69,12-12 30,3 30 11,5 13 6,-1 13-1,-2 12 1,-8 3-17,3 31 5,-13-5-14,-7-9 1,-2 1-48,-5 24-34,-13-4-151,-12-7-247,-12-9-448,-9-11-878,-4-10-2718,-4-10 4543,10-9 0,15 0 0,15-2 0</inkml:trace>
+  <inkml:trace contextRef="#ctx0" brushRef="#br0" timeOffset="124236">23365 13409 19109,'7'0'4576,"-1"0"-3786,-6 0-275,0 0-89,12-79-901,-9 31 573,4-10 0,0-2-14,-5 23 0,-1 2 22,3-5 1,0-1-7,3-2 1,1-1 22,2 1 1,1 2-4,1 3 0,0 2 340,9-16-236,-8 20-134,-7 18-68,-5 10-16,-9 29 27,-1 8-27,1-2 0,-1 3 5,1 2 0,1 1 35,0 3 0,1 2-97,2 1 1,0 0-51,1-1 1,2 0-124,2-3 0,4 0-157,1-3 0,4-1-320,3-4 1,5-3-823,21 16 212,5-18 622,-3-20 527,-7-19 262,-7-16 192,-8-14 257,-7-7 168,-5-1 112,-5 5 444,-3 12-713,-5 13 6,-4 11-403,-3 9-74,-1 9-38,4 6-29,3 4 6,4 2-6,8-1 1,7-5-46,17-4 7,-6-5 4,18-7 18,-10-8 39,5-9 44,-6-8 40,-9-7 78,-8-4 62,-7 1 6,-3 3-23,-6 7-90,-3 9-61,-6 8-17,-7 10-56,-5 10 28,-4 12-23,-3 14-49,0 14-46,15-20 0,3 3-435,1 3 0,3 2-49,2 4 0,4 2-972,7 3 1,5 1 1316,8 9 1,2-3-1,-6-22 1,-1-3 0,2 0-1,1-1 1</inkml:trace>
+  <inkml:trace contextRef="#ctx0" brushRef="#br0" timeOffset="125310">17455 15560 18936,'5'-44'1165,"1"0"0,-2-2 0,0 4-533,-3 3-49,-2-9-62,-5 7 72,-11 12-470,-1 14 73,-17 17-50,-1 14-68,-13 16-47,17-4 0,-1 2-26,6-1 1,0 2-242,-2 6 1,3 0 235,-2 12-31,17-17 0,5-1 9,6-4-34,14 15 0,16-30 22,30-8 34,-16-10-138,-9-4 1,-2-4 204,9-17-20,-17 10 1,-2-3 67,-2-6 0,-3-1 65,4-20-74,-8 4 129,-10 15-39,-1 16 379,-2 2-570,1 12 18,-2 9-18,0 4 313,0 14-312,1 13-12,1-5-27,7 29-29,4-31-61,13 12 78,-1-24-89,22-8 55,1-10 62,0-5 34,11-14 70,-30-7 0,-3-4-20,13-10 3,-15 2 0,-4-2-413,-8-11 457,-4 19 1,-2-1 199,3-27 52,-3 4-259,-3 22 111,-2 5-111,0 21-51,-1 1-45,0 8 517,1 10-506,3 14-39,2 17 12,2 14-12,-3-13 0,1 1-22,-3-12 0,1 1-59,3 16 0,0 2-863,-1-5 1,0-2 699,-1-8 1,0 1-620,-1 12 1,-4-2-8952,-16 11 8586,6-13 1,-7-13-1,13-29 1</inkml:trace>
+  <inkml:trace contextRef="#ctx0" brushRef="#br0" timeOffset="125852">19359 15013 20252,'0'-5'3271,"0"1"-2745,0 4 549,-17-70-615,2 47-312,0-15 1,-4 4-15,-11 29-39,-6 16-61,6 2-3,3 10 0,0 6-12,5-2 1,1 2-327,-10 18 1,0 3 286,3 2 1,3 3-554,8-15 1,1 2 0,0 0 534,1 4 1,1 1 0,1-2-19,-2 11 0,2 0-306,5-11 1,2 2 0,1 1-39,3 1 0,1 0 1,1-2 107,0 13 1,0 1-512,3-1 0,-1 4 1,-2-8 202,-6-13 1,-2-3 437,-6 14 0,-4-6 162,-22-10 117,1-31 1,-1-9 39,-2-10 221,0-16 0,3-10-42,23 6 0,4-3-157,-7-5 0,6-4 227,16-15 1,10 1-284,2 17 0,3 1-93,1 3 0,3-3 0,2 4-19,13-5 0,3 4-20,5 3 1,1 3-15,-8 8 1,2 2-111,2 2 1,4 0 0,-2 1-185,6-1 0,0 2 158,-11 3 1,1 0-1,2 0-1801,9-2 0,1 1 0,-5 2-922,-6 3 0,-2-1 2480,6 0 0,3-1 0,-8 2 0,-1 0 0,-2 1 1</inkml:trace>
+  <inkml:trace contextRef="#ctx0" brushRef="#br0" timeOffset="126743">20118 15174 24122,'-61'-16'149,"0"-1"0,4 4 1,7 10-111,5 40-524,5 8 474,10 5-28,10 1-6,11-2 176,8-13-215,22 3 178,6-22-55,16 1 12,-2-25 27,-2-11 73,-3-12 73,-6-6 56,-7-4 63,-4 1 297,-4 3-298,-5 8-102,-4 8-105,-4 10-51,-1 8-62,-6 11-5,-3 9-6,-7 12-22,-1 10 22,3 7 0,5 4-33,8-1-28,10-4 5,11-7-17,14-12 6,11-13 17,9-17-377,3-17 421,-29 3 1,-1-4 2,0-4 1,-1-2 35,12-20-30,-12 3 0,0-3 11,-9 9 1,-1-1-386,0 1 1,2-3 0,-2 1 370,5-13 0,0 1 9,-2 2 0,0 2 13,-1 5 1,0 2-6,-5 10 1,-1 2 49,4-8-33,-9 19-12,-8 16 394,-9 16-377,-9 16-27,-9 18-15,11-18 1,1 2 311,-1 4 1,1 1-346,2 1 0,2 1 2,3 1 1,1-1 16,0 20-33,10-18 0,5 0-73,13 11 2,-2-17 1,4-1-51,3-11 1,4-5-4,2-3 1,3-5 72,2-3 1,0-4 64,0-7 0,-1-3 44,-3-4 1,-1-3 32,-5-3 0,-1-3 23,-1-6 1,-3-1-9,6-10 68,-1-14 33,-16 19-12,1-9-16,-4 0 546,-2 4-540,-3 6 44,-1 8-151,-3 12 34,-3 6-51,-2 9 1,-5 9-29,4 0 1,-2 14-18,6-2-10,0 14 16,7 9 11,3 8-464,7 4 462,-7-29 0,0 1-48,4 29-251,-6-3 5,-13-9-516,-13-10-857,-8-14-1434,0-11-4536,10-10 7645,10-7 0,8 0 0,2-1 0</inkml:trace>
+  <inkml:trace contextRef="#ctx0" brushRef="#br0" timeOffset="127086">21372 15311 25343,'43'-24'644,"0"0"-588,-23 12 11,6-6 40,-1-4 33,-6-3 78,-5-1 45,-9 2-27,-7 6-68,-9 7-62,-9 8-11,-7 10-16,-4 8-23,-3 11-6,2 6-22,3 5-6,7 3-22,10 1-50,7 0-124,19-1-318,20 0-918,-4-19 0,4-2 1410,15 2 0,-1-3 0,9 4 0,2-7 0</inkml:trace>
+  <inkml:trace contextRef="#ctx0" brushRef="#br0" timeOffset="131186">12054 8952 20683,'-2'10'1568,"1"27"-1215,4 21-294,-2-26 0,0 0-327,0 3 0,-2 1 369,-3 26-1998,1-16 1,-1 1 1862,-3 16-31,2-18 0,3-3-630,4-10-4213,6 19 4908,3-31 0,-2-4 0,-3-9 0</inkml:trace>
+  <inkml:trace contextRef="#ctx0" brushRef="#br0" timeOffset="131451">12046 9356 21982,'40'-28'13,"1"0"1,0 1-1,-5 2 1,-1 0-1,1 5-114,23-1 0,-4 6-655,-22 5 0,-4 0 442,6-3-240,-26 10-311,-8 1 1,1 2 0,-4 0 0</inkml:trace>
+  <inkml:trace contextRef="#ctx0" brushRef="#br0" timeOffset="132809">15428 9110 8758,'-1'-9'9830,"1"1"-7450,0 8-1909,-9-60 167,7 42-301,-5-42-203,9 57 191,2 9 84,1 8 190,0 27-336,-2 12-760,-5-15 0,-1 2 536,-3 22-5,-4-10 0,-1 1-26,3-14 0,1-1-22,-4 16 0,1-1-17,5-20 1,1-2-432,0 7 0,3-2-1566,5 3-829,1 7 2115,7-23 0,-7-16 0,1-1 0</inkml:trace>
+  <inkml:trace contextRef="#ctx0" brushRef="#br0" timeOffset="133102">15407 9372 22599,'45'-32'76,"0"0"1,-1 2-1,-2 6-115,17 7-28,-27 10 0,-1 0-264,31-6-364,-7 3-1142,-12 2-4369,-15 3 6206,-14 2 0,-11 2 0,-3 1 0</inkml:trace>
+  <inkml:trace contextRef="#ctx0" brushRef="#br0" timeOffset="134539">17305 9015 18309,'2'-30'403,"-2"16"1461,-10 44-1702,0 13-50,-1 8-51,1 7-27,2 3-28,3 2 34,3-26 0,1-1-332,3 22 451,1-6-1263,4-15-1729,3-18 2833,1-1 0,-3-9 0,-4-6 0</inkml:trace>
+  <inkml:trace contextRef="#ctx0" brushRef="#br0" timeOffset="134782">17219 9061 11194,'-2'-4'8218,"1"0"-6651,-2-58-1309,7 38-57,3-20 1,4 2-163,9 22-55,28-15-122,-17 22 1,0 3-92,21-8-172,-14 7 1,1 3-2770,15 3 257,-11 0 2913,-1 7 0,-33-1 0,-2 2 0</inkml:trace>
+  <inkml:trace contextRef="#ctx0" brushRef="#br0" timeOffset="135022">17284 9227 9274,'-4'3'9297,"1"-1"-5533,3-2-3517,31-14-152,-9 5-84,20-10-22,-7 9-280,-1 2-2437,23-2-7103,-9 4 8020,-4 0 0,-24 4 0,-15 1 0</inkml:trace>
+  <inkml:trace contextRef="#ctx0" brushRef="#br0" timeOffset="137897">10372 10664 17166,'44'-17'-277,"1"0"0,-1 0 1,-2 1-1,0 1 1,-4 2-161,-2 2 0,-3 3-661,27-4 135,-19 5 807,-26 11-46,-30 8 146,-24 8 92,9-7 1,-2 0-149,-6 2 1,-1-1 391,-3 2 0,0 0 252,0 0 0,0 0 123,5 0 1,1-1 571,-22 10-85,18-6-436,17-9 196,11-5-492,11-4-354,12-7-180,15-5-144,18-7 91,-15 6 1,3 1-51,3-2 1,2 1 29,1 1 1,1 0 0,-3 1 0,-1 2-274,22-3 50,-20 6 230,-24 4 83,-25 7 6,-21 4 101,0 0 0,-3 1 34,3-2 0,-1 0 121,0 1 0,0-1-21,3 0 0,1 0 342,-17 4 180,-8 2 67,12-3-46,14-6-302,15-3-268,13-6-51,14-2-56,13-6-6,16-6-11,14-3 6,-24 8 0,2 0 31,1-1 1,1 1-55,-1 1 1,0-1-245,-2 2 1,-2 1-4910,24-5 5187,-17 5 0,-21 5 0,-12 4 0</inkml:trace>
+  <inkml:trace contextRef="#ctx0" brushRef="#br0" timeOffset="152340">10398 10480 17451,'-2'-20'-766,"0"3"1,2 17-1</inkml:trace>
+  <inkml:trace contextRef="#ctx0" brushRef="#br0" timeOffset="153448">10721 10729 10018,'-7'6'5338,"1"0"-4912,6-6 425,0 0-901,-42-8-365,31 3-940,-32-8-5003,42 4 6358,-1 1 0,2 2 0,0 3 0</inkml:trace>
+  <inkml:trace contextRef="#ctx0" brushRef="#br0" timeOffset="157839">17813 8988 13889,'11'-58'2639,"0"-1"1,-4 20 0,-1 3-2208,7-10 246,-10 36-353,-2 5-225,1 1-60,-2 6 195,0 19-56,-3 10-67,-5 28-79,3-26 1,-1 1-235,-1 5 0,1 1 190,1 1 0,0 1-31,2-1 0,1 0-110,4-1 1,3-2-182,1-1 0,3-1-295,3-2 1,2-3-751,2-2 1,1-3-7404,16 17 8781,-7-14 0,-11-14 0,-8-9 0</inkml:trace>
+  <inkml:trace contextRef="#ctx0" brushRef="#br0" timeOffset="158082">17935 8860 19496,'13'-47'688,"1"-1"1,0 4 0,4 7-695,25 8-223,9 5-331,-15 13 0,-1 2-107,16-2-1145,-16 6 0,-1 2 1812,8 5 0,-12-2 0,-9 2 0</inkml:trace>
+  <inkml:trace contextRef="#ctx0" brushRef="#br0" timeOffset="158272">17947 9150 19123,'37'-20'106,"1"0"1,0 1-1,14-8 1,-4 4-1788,-1 6 348,-9 7 1,-15 4 0,-12 5 0</inkml:trace>
+  <inkml:trace contextRef="#ctx0" brushRef="#br0" timeOffset="172190">10272 10924 6921,'-4'-9'5125,"1"2"-3523,3 7-986,0 0 353,73-35-308,-21 12-1035,-15 7 1,6-4 0,-3 3 482,2-1 0,-1 2-31,10-4 1,-2 0-65,-16 7 0,-1 0 33,7-2 1,-5 1 656,-8 3-441,-6 3-257,-25 5 39,-37 15-28,3-2-1,1 1 1,-3 2 16,8-3 1,0-1-333,-9 4 1,-1-1 354,2 0 0,0-1 11,0 1 0,3 0 1040,-14 4-1096,13-4-22,25-8 50,13-3 57,12-4-24,15-4-55,3-3 0,2-1 0,17-5-12,-6 2 1,2 0-1,-4 1 1,-1 1-9,1 0 1,0-1 4,0 0 1,-2 2 70,2-2 721,-20 6-912,-22 4 77,-23 7-13,-6 3 1,-6 1 39,-3 1 0,-2 1-485,-14 5 1,-2-1 529,6 0 0,3-1-9,10-3 1,1 0 27,-1 1 1,2-1 33,-6 2-56,8-3 67,24-3 17,31-8-67,6-1-6,33-8-34,-26 3 1,2 0 5,12-2 0,4-2-2,-8 2 1,2-1-1,-1 1-592,13-3 0,-2 1 583,-1 0 0,-4 0-9,-11 4 1,-4 2 2,0 1 79,-18 4-17,-41 11-25,-6-2 1,-6 2 24,-13 3 0,-1 1-269,5-3 0,-1 0 328,-2 0 1,-3 2 0,3-2 77,2-2 1,2 1 44,-16 2 0,3 0 322,-1-3 1908,29-5-2345,16-5 84,31-9-168,-2 1-14,16-3 1,7-2-88,-7 4 1,2 1-745,19-5 0,2 1 599,-16 4 0,0 1-605,11-1 0,1 1 812,-5 2 0,-3 1 0,18-3 0,-7 2 0</inkml:trace>
+  <inkml:trace contextRef="#ctx0" brushRef="#br0" timeOffset="180584">5796 17885 8730,'-6'0'6043,"0"0"-3763,6 0 611,0 0-2830,-23-11-10,26 5-141,-11-12-224,41 6-178,16-4 147,-19 8 0,2 0-372,4 0 1,0 1-180,1 2 0,0 2-681,-3 1 0,-2 3-3414,17 11 3272,-25 13 1719,-31 15 0,-28 12-320,8-22 0,-3 0 1462,-4 2 1,0-1-255,6-6 0,0 0 716,-5 2 1,0 1-84,5-4 1,0 0-853,3-3 1,1-1 80,-17 16-161,28-24-386,13-10-125,6-7-117,30-21-102,7-6-27,-9 7 1,3-2 72,-1 2 0,0 0 19,0 0 0,0 0 126,-4 1 0,-2 0-134,13-19 62,-20 12 100,-28-6 163,-17 13 201,-20-7-156,7 13 1421,-13-5-1001,21 8-6,-4-8-392,20 9 432,7-6-471,10 7-124,7-4-94,3 9 27,20 3-67,-2 14 6,22 8-12,-26-2 1,-1 2-394,4 4 0,0 2 254,2 3 0,-1 3-273,-1 2 1,-1 2-994,-4 1 0,-3 2 1400,-4 4 0,-3-1 0,1 4 0,-10-5 0</inkml:trace>
+  <inkml:trace contextRef="#ctx0" brushRef="#br0" timeOffset="184240">25089 15401 7990,'6'-29'-751,"-3"8"1,1 17 0</inkml:trace>
+  <inkml:trace contextRef="#ctx0" brushRef="#br0" timeOffset="185357">25162 15286 7800,'-1'-6'4767,"1"2"3701,0 4-7734,-1-22-117,1 15-80,-1-17-77,-1 20-40,-1 0-56,-5 0-23,-2-1-10,-2 0-74,-4 1-10,2 0-17,1 1-62,5 0-34,4 3-111,3-1 5,6 3-17,2 5 22,7 7-21,4 12-12,2 8 0,0 9-34,-1 11 6,-4 7 3,-9-28 0,-3 0-3,-1 0 0,-4-1-17,-14 25 17,-14-9 56,-15-13 5,-4-13-5,6-14 23,13-17-29,15-16-11,23-16-5,20-11-128,-5 24 1,3 1 129,4-1 1,2 2-358,2 1 1,1 2 351,1 1 0,1 2-20,0 2 0,2 0-14,1 1 1,0 1 18,0 2 1,1 0-192,-2 0 0,1 0 203,-5 3 0,-1-1 11,24-7 17,-19 4 34,-17 4 198,-17 3-232,-7 3 685,-15 2-713,-3 5 440,-8 5-435,-1 5-5,3 8 6,5 5-34,7 4 0,6 3-28,10 0-34,12-1 46,13-4 10,13-4 6,11-7 28,2-7 28,-3-6 17,-12-11-6,-17-8 17,-16-11-6,-26-16-50,3 11 25,-1 6 1,-2 1 7,-7-8 23,-5-7 12,7 8-29,9 11-28,9 9-5,5 6-6,10 4-17,10 0-22,17 2 16,14 1 6,12 1 11,-27 0 1,0 1-117,1 1 1,0 0 124,-1 0 0,-2 1-14,25 6 16,-20-2-10,-10 0 33,-19 0-12,-19 8 7,-9 2-18,-17 8-5,3-1 12,5 1 242,10 0-254,11-2-17,9-3 6,10-4 11,10-3-28,10-6 28,0-3 11,32-5-22,-13-7 13,-13 0 1,0-2 3,7-9 8,-17-3 0,-4-3 36,-1-13 18,1-21 16,-29 10 5,-16 1-156,-15 7 196,-6 7-84,1 8-57,8 8-111,12 7-213,11 5-442,10 9-1384,11 8-3384,8 12 5546,5 0 0,-8-7 0,-5-7 0</inkml:trace>
+  <inkml:trace contextRef="#ctx0" brushRef="#br0" timeOffset="185739">26631 15507 24880,'31'-34'141,"0"-1"0,0 0 1,-2 2-1,1-1 1,-3 4-75,3 0 0,-2 1-341,0-6 1,-1-3 323,-1-3 1,-2-3-276,-2-2 0,-2 0 359,-4 1 1,-2 2 27,-4 4 1,-4 3 83,-7-19-16,-20 17-174,3 20 357,-15 9-379,12 16 60,-5 7-72,0 13-16,2 11-1,1 12-5,13-20 0,1 2-28,1 3 0,3 1-163,1 3 1,3 1 44,5 1 1,5 1-99,4 1 1,4-1-130,7 3 1,4-1-356,3-1 0,2-1-1023,2-2 1,-1-2 1750,-1-5 0,-2-3 0,4 4 0,-13-14 0</inkml:trace>
+  <inkml:trace contextRef="#ctx0" brushRef="#br0" timeOffset="185914">26631 15144 21663,'58'-19'-1001,"0"0"1,0 0-1,-1 1 1,0 1-1,-13 7 1,-12 9-1,0 0 1</inkml:trace>
+  <inkml:trace contextRef="#ctx0" brushRef="#br0" timeOffset="186540">27462 15213 12029,'4'-5'6985,"-2"2"-5571,20-30 0,4-8-58,-3 3-816,7-9 1,-1 0 276,-10 12-273,-8 12-376,-6 10 39,-4 9-173,0 5 61,-4 17-22,-2 7-45,-2 17-39,1-8-34,-2 12 67,4-6-22,-2 19 11,3-11 1,-1-2-1,3-24 62,-2-9 72,1-17-83,1-8-45,4-14 11,7-13-17,2 4-1688,5 0 1,1 0 1687,6-5-6,1-1 1,2-1-12,-5 14 1,1 0 22,18-11 0,1 1-20,-17 15 0,0 3 3,7-2 0,-2 6 0,-6 12-33,2 12 21,-6 2-21,4 30-163,-13 0 28,3 9-510,-5 10-591,-5-25 1,-1 2 490,1 3 0,1 1 778,1 14 0,0-3 0,-1-2 0,2-2 0</inkml:trace>
+  <inkml:trace contextRef="#ctx0" brushRef="#br0" timeOffset="186947">24388 15757 18201,'-55'0'832,"0"0"1,10 0-1,20 0-400,61 0-264,4 0 0,8-1-62,-4 0 1,3 0-1,4 0-1323,-5 0 1,4 0-1,0 1 1,-2-1 1246,10-1 0,-2 1 0,6 0 8,-13 0 0,6 0 0,2 1 1,1-1-1,-2 1 0,-2-1-205,-2 1 0,-2 0 0,-1-1 0,2 1 1,3 0 190,-3 0 0,3 0 0,1 0-1,2 1 1,-1-1 0,0 1 0,-3-1 3,12 1 0,-1 0 0,-2 0 0,0 1 0,0-1-16,-1 1 0,-1 0 0,0 1 1,0-1-1,-2 0-37,-2 0 1,-1 1-1,0-1 1,-2 0-1,0 1-48,8-1 0,-2 1 0,-1 0 0,-1-1-301,-6 1 0,-2-1 0,-1 0 0,-1 0-602,4 0 1,-1 0 0,-3 0 1143,8 0 1,-6 1 0,2-1 0,-25-1-1</inkml:trace>
+  <inkml:trace contextRef="#ctx0" brushRef="#br0" timeOffset="195257">7735 17630 16460,'-2'-3'4021,"1"1"-2912,1 2-723,-2 28-111,2 11-202,-1-6 0,-1 4-493,1 0 0,-1 1 412,0-1 0,0-1-4,0-3 1,0-1 310,1 19 104,1-15 415,0-16-68,0-14-358,2-16-123,2-13-34,4-18-55,3-10-68,7-6 597,-2 11-637,1 18 1,3 1 84,13-3-96,-8 10 1,2 3 11,21 1 56,4 7-90,5 7-328,4 11 278,-28 0 0,0 3-99,0 5 1,-2 3-255,0 5 0,-3 4-868,-2 3 0,-3 2-3684,-3 1 1,-4-1 3256,6 17 1,-11-19 0,-8-23-1</inkml:trace>
+  <inkml:trace contextRef="#ctx0" brushRef="#br0" timeOffset="196890">4910 11436 11351,'0'-3'1745,"-30"-3"0,-12 4-1521,6 6-1261,-11-4 0,-2 1 1261,7 11-17,9-3 1,-2 1-120,-2 0 1,-1 1 26,-9 2 0,-4 1-24,10-3 1,0 0-1,-1 0-1,-12 2 0,0 0-48,1 0 0,1-2 50,1-1 0,3-3-8,9-3 0,0-1 36,-7-1 1,-2-2 80,1-6 1,2-4-96,12 1 1,2-2 39,-23-19-157,33 11 337,9 5-433,10 15 320,2 12 28,3 20 106,1 25 180,0 0-348,-3-10 1,-1 5-508,-3 0 1,-2 3 362,2-6 0,-1 2 1,0 4-15,-1-4 0,-1 4 0,0 1 0,1 1 11,1-8 1,-1 2-1,1 0 1,0-1-1,0-1-659,0 5 0,-1-1 0,1-2 0,1 1 648,0-2 0,0 0 0,0-1 0,1-3 48,1 5 0,0-2 1,0 3-405,0-2 0,1 3 0,-1 0 0,0-2 378,1 7 0,-1-3 0,1 6-175,0-6 1,-1 6 0,1 1 0,0-2 0,0-9 153,0-7 1,-1-6-1,2 5-24,-1 13 0,0 7 0,1 1 0,1-5 35,-1-5 1,2-4 0,0 4 12,1 4 0,2 4 0,-1 1 1,1-5-25,-1-3 0,0-4 1,3 3 26,1 5 0,3 6 0,1-2 0,1-7 163,0-10 0,0-4 0,2 0-194,1 9 1,0 1 0,4-2 5,1-4 1,3-1-1,2-3 10,4 1 0,3-3 0,1 1-27,1 0 1,2 0-1,3-1-7,-6-7 0,2-1 0,1 0 0,0-4-8,8 3 1,1-3 0,-1-2-3,-8-5 1,0-2 0,2-1-36,9 2 0,4-1 0,2-4-66,-7-6 0,2-4 1,0 0-1,-1-1 17,7 2 1,-2 0 0,5-3-107,-8-4 1,3-1 0,3-2 0,0-2-1,-1-2-906,3-3 0,0-3 0,1-1 0,-1-1 0,-1 1 1106,-4 1 0,0 1 0,0-1 0,-1 0 0,-1 0 0,10-3 0,1-1 0,-5 2 0,-7 1 0,-4 0 0,0 0 0</inkml:trace>
+  <inkml:trace contextRef="#ctx0" brushRef="#br0" timeOffset="208706">9822 17391 25774,'-17'7'712,"4"15"-701,17 41-34,-1-10-362,-3-18 1,0 0-25,1 23-535,2-14 1,1 0-267,2 14-1974,3-14 0,0-3-412,-1-9-3324,2 17 6920,-12-34 0,1-3 0,-2-8 0</inkml:trace>
+  <inkml:trace contextRef="#ctx0" brushRef="#br0" timeOffset="208864">9668 17818 13579,'-57'-23'1880,"0"0"0,7 3 0,9 3 354,15 7-1909,14 2 571,21-7-633,25-7-258,16-3-36,-13 9 1,4 1-590,2 1 0,-1 1 463,-5 3 0,0 0-577,14-3 0,2-1 734,0 0 0,-3 1 0,-14 4 0,-2 0 0,-1 0 0,0 0 0</inkml:trace>
+  <inkml:trace contextRef="#ctx0" brushRef="#br0" timeOffset="211387">11533 17208 19434,'-13'-45'1502,"0"0"1,0-1-1,-5-15 1,5 16-1453,10 35 57,6 13 22,6 13-29,8 16-44,9 19-53,-8-6 0,0 4-427,-3-2 0,-2 0 401,2 2 1,-3 1-54,-4 1 1,-2-1-7,-3-9 1,-2 0 67,-2 8 0,-4 0 36,-2-6 1,-5-4 38,-7-8 1,-2-4-11,-9 2 55,-12-22-22,26-29-39,3-21 39,23-19-68,9 18 1,5 0-201,-6 13 0,3 1 178,15-11 1,3 3-309,-9 16 0,1 2 244,8-3 0,2 1-45,-1 2 0,1 3-56,-3 2 0,2 1-109,4-1 0,-1 1 90,15-5 44,-22 7 0,-2 0 51,1-5 834,2-6-510,-11-4-128,-14 9 134,-8-5 28,-9 13 291,-4 1-364,-12 6-123,0 11-32,-1 2 613,-1 16-665,8 0 0,2 12-56,10 0-34,14-1-44,12-3-84,13-5-39,10-6 22,7-8 184,0-7 276,-3-17-63,-20 0 426,-9-24-408,-21 14 89,-11-17 0,-8 11 23,-19-11-163,4 6-45,0 5 0,10 6-28,13 6-39,2 0-39,17-2 28,9 4-17,7 0 11,12 5 17,0 3-50,13 1-1,4 2 6,-19 1 1,-1 1 10,23 1 23,-4 3-23,-17 2 51,-18 2 45,-3 15-23,-9 4-11,-7 4-28,-6 18-17,3-24-16,-1 25 16,18-19-11,5-3 11,16-7 39,6-15-16,-6-7-6,12-10 34,-6-8 5,11-14 22,-6-8 101,-27 7 1,-4 0-17,-1-8-111,-27-19 100,-8 40 78,-29-10-115,17 18 0,-1 2-70,1-1 0,0 1-20,1 2 0,3 0-80,-7-1-623,26 6-879,13 0-4564,24 6 6138,8 0 0,-7 0 0,-9-1 0</inkml:trace>
+  <inkml:trace contextRef="#ctx0" brushRef="#br0" timeOffset="212036">13289 17541 25724,'27'-56'194,"1"0"0,-2 0 0,-5 1-149,-11 11 0,-3 1-444,1-7 0,-2-2 449,-2-5 0,0-1-521,-2 0 0,-1 1 558,-2 4 0,-3 2 41,1 8 1,-2 3 538,-11-14-522,1 26-33,-2 21-72,1 21 393,-1 16-393,2 22-63,9-18 1,3 3 159,1 6 1,3 2-133,4 5 1,4 1-690,4 5 0,5 0 575,6 1 0,4 0-41,-6-18 1,2-1 0,2-1-193,1-1 1,1-2-1,1 0-668,0-2 0,1-1 0,-2-2-3906,10 8 1,-3-3 3274,-10-10 0,-3-3 0,0 2 1,-17-17-1</inkml:trace>
+  <inkml:trace contextRef="#ctx0" brushRef="#br0" timeOffset="212227">13232 17297 18964,'-1'-4'3495,"1"2"-3137,0 2-291,82-67-1414,-54 51 1,2 1 955,10-12 1,7-4 0,-2 5-1514,1 7 0,-1 5 1904,-4 0 0,-2 1 0,11-4 0,-21 7 0</inkml:trace>
+  <inkml:trace contextRef="#ctx0" brushRef="#br0" timeOffset="212779">14616 17182 15877,'0'-5'7102,"0"2"-6441,5-29 0,2-7 285,0 6-596,0-11 1,1 3 159,-3 15-85,-2 12-363,-2 6-23,-1 9 23,0 11-1,0 12-16,0 18-17,-3 15-341,0-23 0,0 2 307,-1 1 1,0 2-18,-1 0 1,0-1 8,0-3 0,1-2 19,-2 20 23,3-18 73,1-20-78,2-13 10,3-20 29,5-14 44,8-19-17,-5 18 1,2-2 24,3-3 0,2-1-95,1 0 1,2 1 27,1 3 1,0 2-17,0 5 0,0 4 19,19-12-5,-4 16-40,-2 13-5,0 18-67,1 14-123,0 18-32,-17-15 1,-1 2-775,-1 3 1,0 2-675,-1 4 1,-1 0 1669,-2-3 0,-2-3 0,3 11 0,-6-20 0</inkml:trace>
+  <inkml:trace contextRef="#ctx0" brushRef="#br0" timeOffset="213928">16503 17060 20151,'-54'-24'1585,"1"1"0,5 3 0,12 4-1507,26 11-11,7 2-55,13 1-80,27-3-21,22-2-106,-28 4 1,4-1 88,26-1 0,0 0-312,-27 2 1,1 0 366,8 0 1,4 1 0,-3 0-9,-3 0 1,-2 2-15,5 0 0,-4 3 51,5 12 122,-48 8-44,-24 5 3,-10-8 0,-5-1-173,0 1 1,-2 1 219,-1 1 1,-4 1 0,1-1-947,8-2 1,0-1 0,1 1 875,-17 7 1,4 0 16,14-6 0,6-2 473,1 4-486,18-2-1,32-13-22,14-8-20,13-9 0,5-5 3,-8 1 0,0-1-722,0-1 0,3-1 1,-4 0 721,2-1 0,-2-1 20,11-12 0,-4-3-59,-23 9 1,-4-3 88,8-12 1,-6-3 918,-15 6 1,-6 1-808,-7-22 177,-5 22 0,-4 2-110,-2 3 281,-17-17-325,18 35 2870,-3 0-3050,12 15 728,3 22-710,7 10-23,4 27-609,0-28 1,0-1 569,9 26-93,-3-20 1,1 0-427,-2-4 0,1 1-1302,4 21 1,-1 2-925,-7-18 0,-1-1 2253,-1 13 0,-4-8 0,-4-27 1,-1-5-1</inkml:trace>
+  <inkml:trace contextRef="#ctx0" brushRef="#br0" timeOffset="215095">8447 18533 7974,'-47'10'1725,"0"0"0,-3 0 0,7 0-621,17-4-427,-4 2-453,19-4 253,11-4-298,13-5-179,17-8 11,20-9 11,-16 7 1,2-1-439,7-1 0,1 0 410,5 0 1,1 1-23,0 2 0,0 2-110,-4 3 1,-3 2-132,20 1 163,-32 13-73,-43 12-28,-38 14 179,8-11 0,-4 1-676,-10 4 1,-2-1 764,16-7 1,-2-1-1,1 0 193,2-1 0,-1 0 1,2-1 284,-16 5 0,1-1-169,5-2 0,1 0-118,4-3 0,2 0-98,1-1 0,2 0-101,6-2 0,4-1-42,-12 2 174,26-6-90,40-18-274,6-1 50,13-6 0,7-4-441,1 0 1,2 0 567,-9 4 0,2-2 1,1 1 2,-1 1 1,0 0 0,-1 1-44,13-4 0,-3 2 660,-12 5 1,-5 1-608,5 0 514,-48 16-592,-39 13 72,6-2 1,-3 0-495,-9 4 1,-2 0 664,-1 0 1,1-1 108,2-1 1,1 0 307,4-3 0,1 1-322,3-2 1,1-1 8,-1 1 0,0 0-67,1 0 0,2-2-115,4 0 0,1-1-37,-14 3-27,21-7 67,24-8-85,39-14-83,1 1 0,7-2-52,-6 2 0,3-1 0,1 0 160,7-2 0,2-1 0,0 1-11,0 0 0,1 0 0,0 0-790,2 0 1,1 1 0,-5 1 767,1 1 1,-4 1 10,3-2 1,-17 9 13,-33 10-44,-35 11-6,-1 1 1,-6 1-399,-14 4 1,-4 2 464,16-6 1,-2 0 0,1 0 152,2 0 1,-1-1 0,2-1 106,-16 5 1,3-1-149,6-3 1,3-1 426,5-2 1,2-1-419,-1-1 0,4-1-98,-4 2 2733,30-18-2890,31-5 0,15-3 2,-4-2 1,3 0-1146,12-4 0,8-3 1227,-5 3 0,8-2 0,-1 0 0,-9 4 0,-6 2 0,-1 1 0,15-6 0,0 0 0,0 0 0</inkml:trace>
+  <inkml:trace contextRef="#ctx0" brushRef="#br0" timeOffset="216236">20288 16899 20156,'-8'-47'1176,"0"1"0,2 2 1,-4 14-1009,-6 27 134,-14 11 6,-8 12-207,11-2 0,-1 3-365,-2 6 1,0 5 291,-8 15 0,1 3-790,11-15 0,2 1 760,2 0 0,0 4 0,4-3-18,3 1 1,4-1-1354,0 15 0,4-1 1361,3-18 1,7-1-45,16 8 0,6-5-79,11-12 85,5-7 0,5-4 16,-8-9 0,1-5 23,11-3 1,2-5 38,8-10 0,-2-7 238,-13-1 0,-3-4-207,1-11 0,-8-3-34,-16 13 0,-6-2 51,-3-13 0,-5-2 1034,-4 7 1,-4-2-1038,-1-10 0,-6-1 18,-1 14 1,-3 1 0,-2 2 22,-9-7 1,-3 4-59,1 3 0,-4 6 31,-5 13 0,-2 7-140,4 7 0,-1 3 64,-8 3 0,-2 6-20,-7 11 1,1 4 16,16-4 1,3 3-68,-11 15 0,4 4-78,18-8 0,4 3-328,-4 19 0,5 3-269,9-6 1,7-1-876,8 8 0,11-2 1609,16-7 0,3-7 0,-15-16 0,-1-3 0,5-4 0,1 0 0</inkml:trace>
+  <inkml:trace contextRef="#ctx0" brushRef="#br0" timeOffset="217044">21468 16661 23769,'-20'-42'517,"0"0"0,2 4 0,-3 13-393,-13 39-57,0 14-16,2 17-43,18-18 0,2 3-310,-1 5 0,2 1 285,1 3 0,3 1-19,0 1 0,3 2-38,4-1 1,3-1 17,0-9 0,2-1-121,8 5 1,5-2-210,10-5 0,5-2-9,2-2 0,4-2-81,11-2 0,2-7-130,-6-13 1,-1-6 521,-1-6 0,-2-4 89,-10 0 1,-3-4 187,7-15 0,-4-4 48,-15 10 1,-1-1-75,6-13 0,-2 0 121,-10 10 1,-3 2 226,1-26-257,-6 20 430,-9-2-363,0 23 221,-2-2-490,4 17 707,1 11-740,1 2 311,-1 17-306,3 13-22,0 4-6,2 10-28,3-15 0,0-7 28,0-11 45,-2-12 50,0-11 6,1-14 22,4-11 6,5-11 56,5-9 72,7-2-38,5 0-152,-6 14 90,13-3-96,-11 20-50,12-1 1,-7 20 10,1 10-39,-1 15-44,0 12-113,-3 9-39,-8-7-753,-9-11 0,-2 0-5756,-1 11 6080,0 10 1,-5-30 0,-1-11 0</inkml:trace>
+  <inkml:trace contextRef="#ctx0" brushRef="#br0" timeOffset="217287">22576 16534 22179,'0'-8'3495,"0"2"-3019,0 6-45,0 0-308,40-21-39,-14 39-62,26-18-11,-30 39 1,-8 11-29,3 4-647,-6-8 0,0 7 0,-3-3 406,-3 0 1,-4 0-195,0-2 0,-1 4 0,-4-4-1478,-7 11 1,-6-5 1929,-1-8 0,-1-5 0,-10 10 0,10-27 0</inkml:trace>
+  <inkml:trace contextRef="#ctx0" brushRef="#br0" timeOffset="217603">20858 17531 19925,'-58'10'540,"0"0"1,1 0 0,-10 1 0,11-1-177,8-3 636,54-8-860,30-8-87,2 2 0,6-1-1016,-2 1 1,4-1-1,2 1 960,-3 0 0,1 0 1,2 1-1,2 0-13,8-1 1,1 1 0,2 1-1,1-1-16,-7 2 1,0 1 0,1-1 0,1 2 0,0-1-367,2 1 0,1 1 1,0 0-1,0 0 0,0 2 267,-1 0 0,1 1 0,-1 1 0,0 0 0,-1 1-89,-4-1 1,0 1-1,-1 0 1,-2 1 0,-1 0-411,4 1 0,-1 1 0,-3 1 0,-2-1 630,2 2 0,-4 0 0,-5-1 0,-5-2 0,-6 0 0,-2 3 0</inkml:trace>
+  <inkml:trace contextRef="#ctx0" brushRef="#br0" timeOffset="217877">21157 17804 15098,'-47'10'1242,"0"0"0,0-1 0,-14 4 1,2-1-686,8-1 0,5-2 345,-5 1-118,49-9 62,44-11-426,-1 2 0,6-1-939,-7 1 0,3-1 0,1 0 719,8 0 0,2 0 0,1 0-612,6 0 0,1 0 0,2 0 480,-14 3 1,2 0 0,-1 0 0,1 1-32,0 0 1,0 0 0,0 0 0,0 0-213,-2 1 0,0 0 0,-1 0 0,-1 0 276,11-1 0,-1 0 0,-2 0-8,-8 1 0,-2 0 1,-3-1 18,8-1 0,-5 0 101,13-4-45,-28 1 951,-20 1-1360,-12 0 1581,-8 0-4667,-9 1 2847,-1 2 1,5 3 0,5 1 0</inkml:trace>
+  <inkml:trace contextRef="#ctx0" brushRef="#br0" timeOffset="259067">21193 5247 24575,'0'0'0</inkml:trace>
 </inkml:ink>
 </file>
 
@@ -6914,6 +7054,287 @@
 </p:sld>
 </file>
 
+<file path=ppt/slides/slide14.xml><?xml version="1.0" encoding="utf-8"?>
+<p:sld xmlns:a="http://schemas.openxmlformats.org/drawingml/2006/main" xmlns:r="http://schemas.openxmlformats.org/officeDocument/2006/relationships" xmlns:p="http://schemas.openxmlformats.org/presentationml/2006/main">
+  <p:cSld>
+    <p:bg>
+      <p:bgPr>
+        <a:solidFill>
+          <a:schemeClr val="bg1"/>
+        </a:solidFill>
+        <a:effectLst/>
+      </p:bgPr>
+    </p:bg>
+    <p:spTree>
+      <p:nvGrpSpPr>
+        <p:cNvPr id="1" name="">
+          <a:extLst>
+            <a:ext uri="{FF2B5EF4-FFF2-40B4-BE49-F238E27FC236}">
+              <a16:creationId xmlns:a16="http://schemas.microsoft.com/office/drawing/2014/main" id="{8342AB8B-D489-957C-1F9D-A0FB8DA19C6C}"/>
+            </a:ext>
+          </a:extLst>
+        </p:cNvPr>
+        <p:cNvGrpSpPr/>
+        <p:nvPr/>
+      </p:nvGrpSpPr>
+      <p:grpSpPr>
+        <a:xfrm>
+          <a:off x="0" y="0"/>
+          <a:ext cx="0" cy="0"/>
+          <a:chOff x="0" y="0"/>
+          <a:chExt cx="0" cy="0"/>
+        </a:xfrm>
+      </p:grpSpPr>
+      <p:sp>
+        <p:nvSpPr>
+          <p:cNvPr id="7" name="Rectangle 6">
+            <a:extLst>
+              <a:ext uri="{FF2B5EF4-FFF2-40B4-BE49-F238E27FC236}">
+                <a16:creationId xmlns:a16="http://schemas.microsoft.com/office/drawing/2014/main" id="{CF4C15D6-1A00-763E-2E58-376BFD14C1CC}"/>
+              </a:ext>
+              <a:ext uri="{C183D7F6-B498-43B3-948B-1728B52AA6E4}">
+                <adec:decorative xmlns:adec="http://schemas.microsoft.com/office/drawing/2017/decorative" val="1"/>
+              </a:ext>
+            </a:extLst>
+          </p:cNvPr>
+          <p:cNvSpPr>
+            <a:spLocks noGrp="1" noRot="1" noChangeAspect="1" noMove="1" noResize="1" noEditPoints="1" noAdjustHandles="1" noChangeArrowheads="1" noChangeShapeType="1" noTextEdit="1"/>
+          </p:cNvSpPr>
+          <p:nvPr>
+            <p:extLst>
+              <p:ext uri="{386F3935-93C4-4BCD-93E2-E3B085C9AB24}">
+                <p16:designElem xmlns:p16="http://schemas.microsoft.com/office/powerpoint/2015/main" val="1"/>
+              </p:ext>
+            </p:extLst>
+          </p:nvPr>
+        </p:nvSpPr>
+        <p:spPr bwMode="white">
+          <a:xfrm>
+            <a:off x="1524" y="0"/>
+            <a:ext cx="12188952" cy="6858000"/>
+          </a:xfrm>
+          <a:prstGeom prst="rect">
+            <a:avLst/>
+          </a:prstGeom>
+          <a:noFill/>
+          <a:ln>
+            <a:noFill/>
+          </a:ln>
+        </p:spPr>
+        <p:style>
+          <a:lnRef idx="2">
+            <a:schemeClr val="accent1">
+              <a:shade val="50000"/>
+            </a:schemeClr>
+          </a:lnRef>
+          <a:fillRef idx="1">
+            <a:schemeClr val="accent1"/>
+          </a:fillRef>
+          <a:effectRef idx="0">
+            <a:schemeClr val="accent1"/>
+          </a:effectRef>
+          <a:fontRef idx="minor">
+            <a:schemeClr val="lt1"/>
+          </a:fontRef>
+        </p:style>
+        <p:txBody>
+          <a:bodyPr rtlCol="0" anchor="ctr"/>
+          <a:lstStyle>
+            <a:defPPr>
+              <a:defRPr lang="en-US"/>
+            </a:defPPr>
+            <a:lvl1pPr marL="0" algn="l" defTabSz="914400" rtl="0" eaLnBrk="1" latinLnBrk="0" hangingPunct="1">
+              <a:defRPr sz="1800" kern="1200">
+                <a:solidFill>
+                  <a:schemeClr val="lt1"/>
+                </a:solidFill>
+                <a:latin typeface="+mn-lt"/>
+                <a:ea typeface="+mn-ea"/>
+                <a:cs typeface="+mn-cs"/>
+              </a:defRPr>
+            </a:lvl1pPr>
+            <a:lvl2pPr marL="457200" algn="l" defTabSz="914400" rtl="0" eaLnBrk="1" latinLnBrk="0" hangingPunct="1">
+              <a:defRPr sz="1800" kern="1200">
+                <a:solidFill>
+                  <a:schemeClr val="lt1"/>
+                </a:solidFill>
+                <a:latin typeface="+mn-lt"/>
+                <a:ea typeface="+mn-ea"/>
+                <a:cs typeface="+mn-cs"/>
+              </a:defRPr>
+            </a:lvl2pPr>
+            <a:lvl3pPr marL="914400" algn="l" defTabSz="914400" rtl="0" eaLnBrk="1" latinLnBrk="0" hangingPunct="1">
+              <a:defRPr sz="1800" kern="1200">
+                <a:solidFill>
+                  <a:schemeClr val="lt1"/>
+                </a:solidFill>
+                <a:latin typeface="+mn-lt"/>
+                <a:ea typeface="+mn-ea"/>
+                <a:cs typeface="+mn-cs"/>
+              </a:defRPr>
+            </a:lvl3pPr>
+            <a:lvl4pPr marL="1371600" algn="l" defTabSz="914400" rtl="0" eaLnBrk="1" latinLnBrk="0" hangingPunct="1">
+              <a:defRPr sz="1800" kern="1200">
+                <a:solidFill>
+                  <a:schemeClr val="lt1"/>
+                </a:solidFill>
+                <a:latin typeface="+mn-lt"/>
+                <a:ea typeface="+mn-ea"/>
+                <a:cs typeface="+mn-cs"/>
+              </a:defRPr>
+            </a:lvl4pPr>
+            <a:lvl5pPr marL="1828800" algn="l" defTabSz="914400" rtl="0" eaLnBrk="1" latinLnBrk="0" hangingPunct="1">
+              <a:defRPr sz="1800" kern="1200">
+                <a:solidFill>
+                  <a:schemeClr val="lt1"/>
+                </a:solidFill>
+                <a:latin typeface="+mn-lt"/>
+                <a:ea typeface="+mn-ea"/>
+                <a:cs typeface="+mn-cs"/>
+              </a:defRPr>
+            </a:lvl5pPr>
+            <a:lvl6pPr marL="2286000" algn="l" defTabSz="914400" rtl="0" eaLnBrk="1" latinLnBrk="0" hangingPunct="1">
+              <a:defRPr sz="1800" kern="1200">
+                <a:solidFill>
+                  <a:schemeClr val="lt1"/>
+                </a:solidFill>
+                <a:latin typeface="+mn-lt"/>
+                <a:ea typeface="+mn-ea"/>
+                <a:cs typeface="+mn-cs"/>
+              </a:defRPr>
+            </a:lvl6pPr>
+            <a:lvl7pPr marL="2743200" algn="l" defTabSz="914400" rtl="0" eaLnBrk="1" latinLnBrk="0" hangingPunct="1">
+              <a:defRPr sz="1800" kern="1200">
+                <a:solidFill>
+                  <a:schemeClr val="lt1"/>
+                </a:solidFill>
+                <a:latin typeface="+mn-lt"/>
+                <a:ea typeface="+mn-ea"/>
+                <a:cs typeface="+mn-cs"/>
+              </a:defRPr>
+            </a:lvl7pPr>
+            <a:lvl8pPr marL="3200400" algn="l" defTabSz="914400" rtl="0" eaLnBrk="1" latinLnBrk="0" hangingPunct="1">
+              <a:defRPr sz="1800" kern="1200">
+                <a:solidFill>
+                  <a:schemeClr val="lt1"/>
+                </a:solidFill>
+                <a:latin typeface="+mn-lt"/>
+                <a:ea typeface="+mn-ea"/>
+                <a:cs typeface="+mn-cs"/>
+              </a:defRPr>
+            </a:lvl8pPr>
+            <a:lvl9pPr marL="3657600" algn="l" defTabSz="914400" rtl="0" eaLnBrk="1" latinLnBrk="0" hangingPunct="1">
+              <a:defRPr sz="1800" kern="1200">
+                <a:solidFill>
+                  <a:schemeClr val="lt1"/>
+                </a:solidFill>
+                <a:latin typeface="+mn-lt"/>
+                <a:ea typeface="+mn-ea"/>
+                <a:cs typeface="+mn-cs"/>
+              </a:defRPr>
+            </a:lvl9pPr>
+          </a:lstStyle>
+          <a:p>
+            <a:pPr algn="ctr"/>
+            <a:endParaRPr lang="en-US"/>
+          </a:p>
+        </p:txBody>
+      </p:sp>
+      <p:pic>
+        <p:nvPicPr>
+          <p:cNvPr id="2" name="Picture 1" descr="A blue and white gradient&#10;&#10;AI-generated content may be incorrect.">
+            <a:extLst>
+              <a:ext uri="{FF2B5EF4-FFF2-40B4-BE49-F238E27FC236}">
+                <a16:creationId xmlns:a16="http://schemas.microsoft.com/office/drawing/2014/main" id="{8B7B6040-11BD-378A-A1D8-C05856D80340}"/>
+              </a:ext>
+            </a:extLst>
+          </p:cNvPr>
+          <p:cNvPicPr>
+            <a:picLocks noChangeAspect="1"/>
+          </p:cNvPicPr>
+          <p:nvPr/>
+        </p:nvPicPr>
+        <p:blipFill>
+          <a:blip r:embed="rId2"/>
+          <a:srcRect b="19"/>
+          <a:stretch>
+            <a:fillRect/>
+          </a:stretch>
+        </p:blipFill>
+        <p:spPr>
+          <a:xfrm>
+            <a:off x="20" y="1282"/>
+            <a:ext cx="12191980" cy="6856718"/>
+          </a:xfrm>
+          <a:prstGeom prst="rect">
+            <a:avLst/>
+          </a:prstGeom>
+        </p:spPr>
+      </p:pic>
+      <mc:AlternateContent xmlns:mc="http://schemas.openxmlformats.org/markup-compatibility/2006">
+        <mc:Choice xmlns:p14="http://schemas.microsoft.com/office/powerpoint/2010/main" Requires="p14">
+          <p:contentPart p14:bwMode="auto" r:id="rId3">
+            <p14:nvContentPartPr>
+              <p14:cNvPr id="3" name="Ink 2">
+                <a:extLst>
+                  <a:ext uri="{FF2B5EF4-FFF2-40B4-BE49-F238E27FC236}">
+                    <a16:creationId xmlns:a16="http://schemas.microsoft.com/office/drawing/2014/main" id="{A1BBB33D-447B-BF09-1329-22A355862BA9}"/>
+                  </a:ext>
+                </a:extLst>
+              </p14:cNvPr>
+              <p14:cNvContentPartPr/>
+              <p14:nvPr/>
+            </p14:nvContentPartPr>
+            <p14:xfrm>
+              <a:off x="1007640" y="1019160"/>
+              <a:ext cx="9118080" cy="5765400"/>
+            </p14:xfrm>
+          </p:contentPart>
+        </mc:Choice>
+        <mc:Fallback>
+          <p:pic>
+            <p:nvPicPr>
+              <p:cNvPr id="3" name="Ink 2">
+                <a:extLst>
+                  <a:ext uri="{FF2B5EF4-FFF2-40B4-BE49-F238E27FC236}">
+                    <a16:creationId xmlns:a16="http://schemas.microsoft.com/office/drawing/2014/main" id="{A1BBB33D-447B-BF09-1329-22A355862BA9}"/>
+                  </a:ext>
+                </a:extLst>
+              </p:cNvPr>
+              <p:cNvPicPr/>
+              <p:nvPr/>
+            </p:nvPicPr>
+            <p:blipFill>
+              <a:blip r:embed="rId4"/>
+              <a:stretch>
+                <a:fillRect/>
+              </a:stretch>
+            </p:blipFill>
+            <p:spPr>
+              <a:xfrm>
+                <a:off x="998280" y="1009800"/>
+                <a:ext cx="9136800" cy="5784120"/>
+              </a:xfrm>
+              <a:prstGeom prst="rect">
+                <a:avLst/>
+              </a:prstGeom>
+            </p:spPr>
+          </p:pic>
+        </mc:Fallback>
+      </mc:AlternateContent>
+    </p:spTree>
+    <p:extLst>
+      <p:ext uri="{BB962C8B-B14F-4D97-AF65-F5344CB8AC3E}">
+        <p14:creationId xmlns:p14="http://schemas.microsoft.com/office/powerpoint/2010/main" val="3566050207"/>
+      </p:ext>
+    </p:extLst>
+  </p:cSld>
+  <p:clrMapOvr>
+    <a:masterClrMapping/>
+  </p:clrMapOvr>
+</p:sld>
+</file>
+
 <file path=ppt/slides/slide2.xml><?xml version="1.0" encoding="utf-8"?>
 <p:sld xmlns:a="http://schemas.openxmlformats.org/drawingml/2006/main" xmlns:r="http://schemas.openxmlformats.org/officeDocument/2006/relationships" xmlns:p="http://schemas.openxmlformats.org/presentationml/2006/main">
   <p:cSld>
